--- a/ppt/elevator-escalator-fleet-monitoring.pptx
+++ b/ppt/elevator-escalator-fleet-monitoring.pptx
@@ -3101,8 +3101,52 @@
         </p:nvSpPr>
         <p:spPr>
           <a:xfrm>
-            <a:off x="0" y="0"/>
-            <a:ext cx="12191695" cy="2651760"/>
+            <a:off x="-91440" y="-91440"/>
+            <a:ext cx="12435840" cy="7132320"/>
+          </a:xfrm>
+          <a:prstGeom prst="rect">
+            <a:avLst/>
+          </a:prstGeom>
+          <a:solidFill>
+            <a:srgbClr val="FFFFFF"/>
+          </a:solidFill>
+          <a:ln>
+            <a:noFill/>
+          </a:ln>
+          <a:effectLst/>
+        </p:spPr>
+        <p:style>
+          <a:lnRef idx="1">
+            <a:schemeClr val="accent1"/>
+          </a:lnRef>
+          <a:fillRef idx="3">
+            <a:schemeClr val="accent1"/>
+          </a:fillRef>
+          <a:effectRef idx="2">
+            <a:schemeClr val="accent1"/>
+          </a:effectRef>
+          <a:fontRef idx="minor">
+            <a:schemeClr val="lt1"/>
+          </a:fontRef>
+        </p:style>
+        <p:txBody>
+          <a:bodyPr rtlCol="0" anchor="ctr"/>
+          <a:lstStyle/>
+          <a:p>
+            <a:pPr algn="ctr"/>
+          </a:p>
+        </p:txBody>
+      </p:sp>
+      <p:sp>
+        <p:nvSpPr>
+          <p:cNvPr id="3" name="Rectangle 2"/>
+          <p:cNvSpPr/>
+          <p:nvPr/>
+        </p:nvSpPr>
+        <p:spPr>
+          <a:xfrm>
+            <a:off x="-91440" y="-91440"/>
+            <a:ext cx="12435840" cy="4160520"/>
           </a:xfrm>
           <a:prstGeom prst="rect">
             <a:avLst/>
@@ -3139,14 +3183,58 @@
       </p:sp>
       <p:sp>
         <p:nvSpPr>
-          <p:cNvPr id="3" name="TextBox 2"/>
+          <p:cNvPr id="4" name="Oval 3"/>
+          <p:cNvSpPr/>
+          <p:nvPr/>
+        </p:nvSpPr>
+        <p:spPr>
+          <a:xfrm>
+            <a:off x="5570524" y="525780"/>
+            <a:ext cx="1051560" cy="1051560"/>
+          </a:xfrm>
+          <a:prstGeom prst="ellipse">
+            <a:avLst/>
+          </a:prstGeom>
+          <a:solidFill>
+            <a:srgbClr val="FFFFFF"/>
+          </a:solidFill>
+          <a:ln>
+            <a:noFill/>
+          </a:ln>
+          <a:effectLst/>
+        </p:spPr>
+        <p:style>
+          <a:lnRef idx="1">
+            <a:schemeClr val="accent1"/>
+          </a:lnRef>
+          <a:fillRef idx="3">
+            <a:schemeClr val="accent1"/>
+          </a:fillRef>
+          <a:effectRef idx="2">
+            <a:schemeClr val="accent1"/>
+          </a:effectRef>
+          <a:fontRef idx="minor">
+            <a:schemeClr val="lt1"/>
+          </a:fontRef>
+        </p:style>
+        <p:txBody>
+          <a:bodyPr rtlCol="0" anchor="ctr"/>
+          <a:lstStyle/>
+          <a:p>
+            <a:pPr algn="ctr"/>
+          </a:p>
+        </p:txBody>
+      </p:sp>
+      <p:sp>
+        <p:nvSpPr>
+          <p:cNvPr id="5" name="TextBox 4"/>
           <p:cNvSpPr txBox="1"/>
           <p:nvPr/>
         </p:nvSpPr>
         <p:spPr>
           <a:xfrm>
-            <a:off x="731520" y="731520"/>
-            <a:ext cx="10698480" cy="1463040"/>
+            <a:off x="5570524" y="525780"/>
+            <a:ext cx="1051560" cy="1051560"/>
           </a:xfrm>
           <a:prstGeom prst="rect">
             <a:avLst/>
@@ -3154,34 +3242,34 @@
           <a:noFill/>
         </p:spPr>
         <p:txBody>
-          <a:bodyPr wrap="square" anchor="ctr">
+          <a:bodyPr wrap="none" anchor="ctr">
             <a:spAutoFit/>
           </a:bodyPr>
           <a:lstStyle/>
           <a:p>
-            <a:pPr algn="l"/>
-            <a:r>
-              <a:rPr sz="3000" b="1">
-                <a:solidFill>
-                  <a:srgbClr val="FFFFFF"/>
+            <a:pPr algn="ctr"/>
+            <a:r>
+              <a:rPr sz="3400" b="1">
+                <a:solidFill>
+                  <a:srgbClr val="445055"/>
                 </a:solidFill>
                 <a:latin typeface="Corbel"/>
               </a:rPr>
-              <a:t>Elevator and Escalator Fleet Monitoring</a:t>
-            </a:r>
-          </a:p>
-        </p:txBody>
-      </p:sp>
-      <p:sp>
-        <p:nvSpPr>
-          <p:cNvPr id="4" name="TextBox 3"/>
+              <a:t>EE</a:t>
+            </a:r>
+          </a:p>
+        </p:txBody>
+      </p:sp>
+      <p:sp>
+        <p:nvSpPr>
+          <p:cNvPr id="6" name="TextBox 5"/>
           <p:cNvSpPr txBox="1"/>
           <p:nvPr/>
         </p:nvSpPr>
         <p:spPr>
           <a:xfrm>
-            <a:off x="731520" y="3108960"/>
-            <a:ext cx="10698480" cy="2743200"/>
+            <a:off x="914400" y="1874519"/>
+            <a:ext cx="10332720" cy="1554480"/>
           </a:xfrm>
           <a:prstGeom prst="rect">
             <a:avLst/>
@@ -3189,52 +3277,98 @@
           <a:noFill/>
         </p:spPr>
         <p:txBody>
+          <a:bodyPr wrap="square" anchor="ctr">
+            <a:spAutoFit/>
+          </a:bodyPr>
+          <a:lstStyle/>
+          <a:p>
+            <a:pPr algn="ctr"/>
+            <a:r>
+              <a:rPr sz="3400" b="1" i="0">
+                <a:solidFill>
+                  <a:srgbClr val="FFFFFF"/>
+                </a:solidFill>
+                <a:latin typeface="Corbel"/>
+              </a:rPr>
+              <a:t>Elevator and Escalator Fleet Monitoring</a:t>
+            </a:r>
+          </a:p>
+        </p:txBody>
+      </p:sp>
+      <p:sp>
+        <p:nvSpPr>
+          <p:cNvPr id="7" name="TextBox 6"/>
+          <p:cNvSpPr txBox="1"/>
+          <p:nvPr/>
+        </p:nvSpPr>
+        <p:spPr>
+          <a:xfrm>
+            <a:off x="1371600" y="4434840"/>
+            <a:ext cx="9418320" cy="548640"/>
+          </a:xfrm>
+          <a:prstGeom prst="rect">
+            <a:avLst/>
+          </a:prstGeom>
+          <a:noFill/>
+        </p:spPr>
+        <p:txBody>
           <a:bodyPr wrap="square" anchor="t">
             <a:spAutoFit/>
           </a:bodyPr>
           <a:lstStyle/>
           <a:p>
-            <a:pPr algn="l"/>
-            <a:r>
-              <a:rPr sz="1800" b="0">
-                <a:solidFill>
-                  <a:srgbClr val="5C655F"/>
+            <a:pPr algn="ctr"/>
+            <a:r>
+              <a:rPr sz="1800" b="0" i="1">
+                <a:solidFill>
+                  <a:srgbClr val="394448"/>
                 </a:solidFill>
                 <a:latin typeface="Calibri"/>
               </a:rPr>
               <a:t>Edge-to-cloud safety monitoring for a two-tower elevator and escalator fleet</a:t>
             </a:r>
           </a:p>
-          <a:p>
-            <a:pPr algn="l"/>
-            <a:r>
-              <a:rPr sz="1600" b="1">
-                <a:solidFill>
-                  <a:srgbClr val="232A26"/>
+        </p:txBody>
+      </p:sp>
+      <p:sp>
+        <p:nvSpPr>
+          <p:cNvPr id="8" name="TextBox 7"/>
+          <p:cNvSpPr txBox="1"/>
+          <p:nvPr/>
+        </p:nvSpPr>
+        <p:spPr>
+          <a:xfrm>
+            <a:off x="1371600" y="5212080"/>
+            <a:ext cx="9418320" cy="1371600"/>
+          </a:xfrm>
+          <a:prstGeom prst="rect">
+            <a:avLst/>
+          </a:prstGeom>
+          <a:noFill/>
+        </p:spPr>
+        <p:txBody>
+          <a:bodyPr wrap="square" anchor="t">
+            <a:spAutoFit/>
+          </a:bodyPr>
+          <a:lstStyle/>
+          <a:p>
+            <a:pPr algn="ctr"/>
+            <a:r>
+              <a:rPr sz="1250" b="0" i="0">
+                <a:solidFill>
+                  <a:srgbClr val="5A635C"/>
                 </a:solidFill>
                 <a:latin typeface="Calibri"/>
               </a:rPr>
-              <a:t/>
-            </a:r>
-          </a:p>
-          <a:p>
-            <a:pPr algn="l"/>
-            <a:r>
-              <a:rPr sz="1300" b="0">
-                <a:solidFill>
-                  <a:srgbClr val="5C655F"/>
-                </a:solidFill>
-                <a:latin typeface="Calibri"/>
-              </a:rPr>
               <a:t>MSc in Cloud Computing   ·   Fog and Edge Computing (H9FECC)</a:t>
             </a:r>
           </a:p>
           <a:p>
-            <a:pPr algn="l"/>
-            <a:r>
-              <a:rPr sz="1300" b="0">
-                <a:solidFill>
-                  <a:srgbClr val="5C655F"/>
+            <a:pPr algn="ctr"/>
+            <a:r>
+              <a:rPr sz="1250" b="0" i="0">
+                <a:solidFill>
+                  <a:srgbClr val="5A635C"/>
                 </a:solidFill>
                 <a:latin typeface="Calibri"/>
               </a:rPr>

--- a/ppt/elevator-escalator-fleet-monitoring.pptx
+++ b/ppt/elevator-escalator-fleet-monitoring.pptx
@@ -3183,58 +3183,14 @@
       </p:sp>
       <p:sp>
         <p:nvSpPr>
-          <p:cNvPr id="4" name="Oval 3"/>
-          <p:cNvSpPr/>
+          <p:cNvPr id="4" name="TextBox 3"/>
+          <p:cNvSpPr txBox="1"/>
           <p:nvPr/>
         </p:nvSpPr>
         <p:spPr>
           <a:xfrm>
-            <a:off x="5570524" y="525780"/>
-            <a:ext cx="1051560" cy="1051560"/>
-          </a:xfrm>
-          <a:prstGeom prst="ellipse">
-            <a:avLst/>
-          </a:prstGeom>
-          <a:solidFill>
-            <a:srgbClr val="FFFFFF"/>
-          </a:solidFill>
-          <a:ln>
-            <a:noFill/>
-          </a:ln>
-          <a:effectLst/>
-        </p:spPr>
-        <p:style>
-          <a:lnRef idx="1">
-            <a:schemeClr val="accent1"/>
-          </a:lnRef>
-          <a:fillRef idx="3">
-            <a:schemeClr val="accent1"/>
-          </a:fillRef>
-          <a:effectRef idx="2">
-            <a:schemeClr val="accent1"/>
-          </a:effectRef>
-          <a:fontRef idx="minor">
-            <a:schemeClr val="lt1"/>
-          </a:fontRef>
-        </p:style>
-        <p:txBody>
-          <a:bodyPr rtlCol="0" anchor="ctr"/>
-          <a:lstStyle/>
-          <a:p>
-            <a:pPr algn="ctr"/>
-          </a:p>
-        </p:txBody>
-      </p:sp>
-      <p:sp>
-        <p:nvSpPr>
-          <p:cNvPr id="5" name="TextBox 4"/>
-          <p:cNvSpPr txBox="1"/>
-          <p:nvPr/>
-        </p:nvSpPr>
-        <p:spPr>
-          <a:xfrm>
-            <a:off x="5570524" y="525780"/>
-            <a:ext cx="1051560" cy="1051560"/>
+            <a:off x="914400" y="1143000"/>
+            <a:ext cx="10332720" cy="1965960"/>
           </a:xfrm>
           <a:prstGeom prst="rect">
             <a:avLst/>
@@ -3242,41 +3198,6 @@
           <a:noFill/>
         </p:spPr>
         <p:txBody>
-          <a:bodyPr wrap="none" anchor="ctr">
-            <a:spAutoFit/>
-          </a:bodyPr>
-          <a:lstStyle/>
-          <a:p>
-            <a:pPr algn="ctr"/>
-            <a:r>
-              <a:rPr sz="3400" b="1">
-                <a:solidFill>
-                  <a:srgbClr val="445055"/>
-                </a:solidFill>
-                <a:latin typeface="Corbel"/>
-              </a:rPr>
-              <a:t>EE</a:t>
-            </a:r>
-          </a:p>
-        </p:txBody>
-      </p:sp>
-      <p:sp>
-        <p:nvSpPr>
-          <p:cNvPr id="6" name="TextBox 5"/>
-          <p:cNvSpPr txBox="1"/>
-          <p:nvPr/>
-        </p:nvSpPr>
-        <p:spPr>
-          <a:xfrm>
-            <a:off x="914400" y="1874519"/>
-            <a:ext cx="10332720" cy="1554480"/>
-          </a:xfrm>
-          <a:prstGeom prst="rect">
-            <a:avLst/>
-          </a:prstGeom>
-          <a:noFill/>
-        </p:spPr>
-        <p:txBody>
           <a:bodyPr wrap="square" anchor="ctr">
             <a:spAutoFit/>
           </a:bodyPr>
@@ -3297,7 +3218,7 @@
       </p:sp>
       <p:sp>
         <p:nvSpPr>
-          <p:cNvPr id="7" name="TextBox 6"/>
+          <p:cNvPr id="5" name="TextBox 4"/>
           <p:cNvSpPr txBox="1"/>
           <p:nvPr/>
         </p:nvSpPr>
@@ -3332,7 +3253,7 @@
       </p:sp>
       <p:sp>
         <p:nvSpPr>
-          <p:cNvPr id="8" name="TextBox 7"/>
+          <p:cNvPr id="6" name="TextBox 5"/>
           <p:cNvSpPr txBox="1"/>
           <p:nvPr/>
         </p:nvSpPr>

--- a/ppt/elevator-escalator-fleet-monitoring.pptx
+++ b/ppt/elevator-escalator-fleet-monitoring.pptx
@@ -3152,7 +3152,7 @@
             <a:avLst/>
           </a:prstGeom>
           <a:solidFill>
-            <a:srgbClr val="445055"/>
+            <a:srgbClr val="9A4A6A"/>
           </a:solidFill>
           <a:ln>
             <a:noFill/>
@@ -3242,7 +3242,7 @@
             <a:r>
               <a:rPr sz="1800" b="0" i="1">
                 <a:solidFill>
-                  <a:srgbClr val="394448"/>
+                  <a:srgbClr val="823E5A"/>
                 </a:solidFill>
                 <a:latin typeface="Calibri"/>
               </a:rPr>
@@ -3331,7 +3331,7 @@
             <a:avLst/>
           </a:prstGeom>
           <a:solidFill>
-            <a:srgbClr val="445055"/>
+            <a:srgbClr val="9A4A6A"/>
           </a:solidFill>
           <a:ln>
             <a:noFill/>
@@ -3471,7 +3471,7 @@
             <a:r>
               <a:rPr sz="1500" b="1">
                 <a:solidFill>
-                  <a:srgbClr val="445055"/>
+                  <a:srgbClr val="9A4A6A"/>
                 </a:solidFill>
                 <a:latin typeface="Calibri"/>
               </a:rPr>
@@ -3593,7 +3593,7 @@
             <a:avLst/>
           </a:prstGeom>
           <a:solidFill>
-            <a:srgbClr val="445055"/>
+            <a:srgbClr val="9A4A6A"/>
           </a:solidFill>
           <a:ln>
             <a:noFill/>
@@ -3685,7 +3685,7 @@
             <a:r>
               <a:rPr sz="1500" b="1">
                 <a:solidFill>
-                  <a:srgbClr val="445055"/>
+                  <a:srgbClr val="9A4A6A"/>
                 </a:solidFill>
                 <a:latin typeface="Calibri"/>
               </a:rPr>
@@ -3829,7 +3829,7 @@
             <a:r>
               <a:rPr sz="1500" b="1">
                 <a:solidFill>
-                  <a:srgbClr val="445055"/>
+                  <a:srgbClr val="9A4A6A"/>
                 </a:solidFill>
                 <a:latin typeface="Calibri"/>
               </a:rPr>
@@ -3871,7 +3871,7 @@
             <a:avLst/>
           </a:prstGeom>
           <a:solidFill>
-            <a:srgbClr val="445055"/>
+            <a:srgbClr val="9A4A6A"/>
           </a:solidFill>
           <a:ln>
             <a:noFill/>
@@ -4027,7 +4027,7 @@
             <a:r>
               <a:rPr sz="1500" b="1">
                 <a:solidFill>
-                  <a:srgbClr val="445055"/>
+                  <a:srgbClr val="9A4A6A"/>
                 </a:solidFill>
                 <a:latin typeface="Calibri"/>
               </a:rPr>
@@ -4093,7 +4093,7 @@
             <a:avLst/>
           </a:prstGeom>
           <a:solidFill>
-            <a:srgbClr val="445055"/>
+            <a:srgbClr val="9A4A6A"/>
           </a:solidFill>
           <a:ln>
             <a:noFill/>
@@ -4233,7 +4233,7 @@
             <a:r>
               <a:rPr sz="1500" b="1">
                 <a:solidFill>
-                  <a:srgbClr val="445055"/>
+                  <a:srgbClr val="9A4A6A"/>
                 </a:solidFill>
                 <a:latin typeface="Calibri"/>
               </a:rPr>
@@ -4329,7 +4329,7 @@
             <a:r>
               <a:rPr sz="1500" b="1">
                 <a:solidFill>
-                  <a:srgbClr val="445055"/>
+                  <a:srgbClr val="9A4A6A"/>
                 </a:solidFill>
                 <a:latin typeface="Calibri"/>
               </a:rPr>
@@ -4371,7 +4371,7 @@
             <a:avLst/>
           </a:prstGeom>
           <a:solidFill>
-            <a:srgbClr val="445055"/>
+            <a:srgbClr val="9A4A6A"/>
           </a:solidFill>
           <a:ln>
             <a:noFill/>
@@ -4463,7 +4463,7 @@
             <a:r>
               <a:rPr sz="1700" b="1">
                 <a:solidFill>
-                  <a:srgbClr val="445055"/>
+                  <a:srgbClr val="9A4A6A"/>
                 </a:solidFill>
                 <a:latin typeface="Calibri"/>
               </a:rPr>
@@ -4495,7 +4495,7 @@
             <a:r>
               <a:rPr sz="1700" b="1">
                 <a:solidFill>
-                  <a:srgbClr val="445055"/>
+                  <a:srgbClr val="9A4A6A"/>
                 </a:solidFill>
                 <a:latin typeface="Calibri"/>
               </a:rPr>
@@ -4527,7 +4527,7 @@
             <a:r>
               <a:rPr sz="1700" b="1">
                 <a:solidFill>
-                  <a:srgbClr val="445055"/>
+                  <a:srgbClr val="9A4A6A"/>
                 </a:solidFill>
                 <a:latin typeface="Calibri"/>
               </a:rPr>

--- a/ppt/elevator-escalator-fleet-monitoring.pptx
+++ b/ppt/elevator-escalator-fleet-monitoring.pptx
@@ -3318,14 +3318,237 @@
       <p:grpSpPr/>
       <p:sp>
         <p:nvSpPr>
-          <p:cNvPr id="4" name="Rectangle 3"/>
+          <p:cNvPr id="2" name="Title 1"/>
+          <p:cNvSpPr>
+            <a:spLocks noGrp="1"/>
+          </p:cNvSpPr>
+          <p:nvPr>
+            <p:ph type="title"/>
+          </p:nvPr>
+        </p:nvSpPr>
+        <p:spPr>
+          <a:xfrm>
+            <a:off x="640080" y="384048"/>
+            <a:ext cx="10972800" cy="868680"/>
+          </a:xfrm>
+        </p:spPr>
+        <p:txBody>
+          <a:bodyPr wrap="square" anchor="t"/>
+          <a:lstStyle/>
+          <a:p>
+            <a:pPr algn="l"/>
+            <a:r>
+              <a:rPr b="1" sz="2400">
+                <a:solidFill>
+                  <a:srgbClr val="9A4A6A"/>
+                </a:solidFill>
+                <a:latin typeface="Corbel"/>
+              </a:rPr>
+              <a:t>Why periodic checks fail for a lift fleet</a:t>
+            </a:r>
+          </a:p>
+        </p:txBody>
+      </p:sp>
+      <p:sp>
+        <p:nvSpPr>
+          <p:cNvPr id="3" name="Content Placeholder 2"/>
+          <p:cNvSpPr>
+            <a:spLocks noGrp="1"/>
+          </p:cNvSpPr>
+          <p:nvPr>
+            <p:ph idx="1" sz="half"/>
+          </p:nvPr>
+        </p:nvSpPr>
+        <p:spPr>
+          <a:xfrm>
+            <a:off x="658368" y="1481328"/>
+            <a:ext cx="4892040" cy="4846320"/>
+          </a:xfrm>
+        </p:spPr>
+        <p:txBody>
+          <a:bodyPr wrap="square">
+            <a:normAutofit/>
+          </a:bodyPr>
+          <a:lstStyle/>
+          <a:p>
+            <a:pPr>
+              <a:spcAft>
+                <a:spcPts val="800"/>
+              </a:spcAft>
+            </a:pPr>
+            <a:r>
+              <a:rPr sz="1500" b="0">
+                <a:solidFill>
+                  <a:srgbClr val="232A26"/>
+                </a:solidFill>
+                <a:latin typeface="Calibri"/>
+              </a:rPr>
+              <a:t>Two towers, five metrics each: motor temperature, door cycles, cab vibration, load weight and travel speed. Ten live streams, some sampling every single second.</a:t>
+            </a:r>
+          </a:p>
+          <a:p>
+            <a:pPr>
+              <a:spcAft>
+                <a:spcPts val="800"/>
+              </a:spcAft>
+            </a:pPr>
+            <a:r>
+              <a:rPr sz="1500" b="0">
+                <a:solidFill>
+                  <a:srgbClr val="232A26"/>
+                </a:solidFill>
+                <a:latin typeface="Calibri"/>
+              </a:rPr>
+              <a:t>Faults build between visits. A motor drifting past 85 degrees C, or a cab crawling below 0.5 metres per second, stays invisible until an engineer is standing in front of the unit.</a:t>
+            </a:r>
+          </a:p>
+          <a:p>
+            <a:pPr>
+              <a:spcAft>
+                <a:spcPts val="800"/>
+              </a:spcAft>
+            </a:pPr>
+            <a:r>
+              <a:rPr sz="1500" b="0">
+                <a:solidFill>
+                  <a:srgbClr val="232A26"/>
+                </a:solidFill>
+                <a:latin typeface="Calibri"/>
+              </a:rPr>
+              <a:t>A clipboard round captures one moment in time; the fleet changes state every second, around the clock.</a:t>
+            </a:r>
+          </a:p>
+          <a:p>
+            <a:pPr>
+              <a:spcAft>
+                <a:spcPts val="800"/>
+              </a:spcAft>
+            </a:pPr>
+            <a:r>
+              <a:rPr sz="1500" b="1">
+                <a:solidFill>
+                  <a:srgbClr val="9A4A6A"/>
+                </a:solidFill>
+                <a:latin typeface="Calibri"/>
+              </a:rPr>
+              <a:t>The four fleet-safety rules watched continuously:</a:t>
+            </a:r>
+          </a:p>
+          <a:p>
+            <a:pPr lvl="1">
+              <a:spcAft>
+                <a:spcPts val="800"/>
+              </a:spcAft>
+            </a:pPr>
+            <a:r>
+              <a:rPr sz="1300" b="0">
+                <a:solidFill>
+                  <a:srgbClr val="232A26"/>
+                </a:solidFill>
+                <a:latin typeface="Calibri"/>
+              </a:rPr>
+              <a:t>Motor overheat: average temperature above 85 C</a:t>
+            </a:r>
+          </a:p>
+          <a:p>
+            <a:pPr lvl="1">
+              <a:spcAft>
+                <a:spcPts val="800"/>
+              </a:spcAft>
+            </a:pPr>
+            <a:r>
+              <a:rPr sz="1300" b="0">
+                <a:solidFill>
+                  <a:srgbClr val="232A26"/>
+                </a:solidFill>
+                <a:latin typeface="Calibri"/>
+              </a:rPr>
+              <a:t>Ride quality: vibration above 6 mm</a:t>
+            </a:r>
+          </a:p>
+          <a:p>
+            <a:pPr lvl="1">
+              <a:spcAft>
+                <a:spcPts val="800"/>
+              </a:spcAft>
+            </a:pPr>
+            <a:r>
+              <a:rPr sz="1300" b="0">
+                <a:solidFill>
+                  <a:srgbClr val="232A26"/>
+                </a:solidFill>
+                <a:latin typeface="Calibri"/>
+              </a:rPr>
+              <a:t>Overload: load above 1,000 kg</a:t>
+            </a:r>
+          </a:p>
+          <a:p>
+            <a:pPr lvl="1">
+              <a:spcAft>
+                <a:spcPts val="800"/>
+              </a:spcAft>
+            </a:pPr>
+            <a:r>
+              <a:rPr sz="1300" b="0">
+                <a:solidFill>
+                  <a:srgbClr val="232A26"/>
+                </a:solidFill>
+                <a:latin typeface="Calibri"/>
+              </a:rPr>
+              <a:t>Stall: speed below 0.5 m/s</a:t>
+            </a:r>
+          </a:p>
+        </p:txBody>
+      </p:sp>
+      <p:sp>
+        <p:nvSpPr>
+          <p:cNvPr id="4" name="Content Placeholder 3"/>
+          <p:cNvSpPr>
+            <a:spLocks noGrp="1"/>
+          </p:cNvSpPr>
+          <p:nvPr>
+            <p:ph idx="2" sz="half"/>
+          </p:nvPr>
+        </p:nvSpPr>
+        <p:spPr>
+          <a:xfrm>
+            <a:off x="6382512" y="1481328"/>
+            <a:ext cx="4892040" cy="4846320"/>
+          </a:xfrm>
+        </p:spPr>
+        <p:txBody>
+          <a:bodyPr wrap="square">
+            <a:normAutofit/>
+          </a:bodyPr>
+          <a:lstStyle/>
+          <a:p>
+            <a:pPr>
+              <a:spcAft>
+                <a:spcPts val="800"/>
+              </a:spcAft>
+            </a:pPr>
+            <a:r>
+              <a:rPr sz="1500" b="0">
+                <a:solidFill>
+                  <a:srgbClr val="232A26"/>
+                </a:solidFill>
+                <a:latin typeface="Calibri"/>
+              </a:rPr>
+              <a:t>Each rule fires on window aggregates, not one noisy reading.</a:t>
+            </a:r>
+          </a:p>
+        </p:txBody>
+      </p:sp>
+      <p:sp>
+        <p:nvSpPr>
+          <p:cNvPr id="5" name="Rectangle 4"/>
           <p:cNvSpPr/>
           <p:nvPr/>
         </p:nvSpPr>
         <p:spPr>
           <a:xfrm>
-            <a:off x="0" y="0"/>
-            <a:ext cx="12191695" cy="1051560"/>
+            <a:off x="658368" y="1261872"/>
+            <a:ext cx="3108960" cy="36576"/>
           </a:xfrm>
           <a:prstGeom prst="rect">
             <a:avLst/>
@@ -3362,232 +3585,14 @@
       </p:sp>
       <p:sp>
         <p:nvSpPr>
-          <p:cNvPr id="2" name="Title 1"/>
-          <p:cNvSpPr>
-            <a:spLocks noGrp="1"/>
-          </p:cNvSpPr>
-          <p:nvPr>
-            <p:ph type="title"/>
-          </p:nvPr>
+          <p:cNvPr id="6" name="Rectangle 5"/>
+          <p:cNvSpPr/>
+          <p:nvPr/>
         </p:nvSpPr>
         <p:spPr>
           <a:xfrm>
-            <a:off x="640080" y="0"/>
-            <a:ext cx="10972800" cy="1051560"/>
-          </a:xfrm>
-        </p:spPr>
-        <p:txBody>
-          <a:bodyPr wrap="square" anchor="ctr"/>
-          <a:lstStyle/>
-          <a:p>
-            <a:pPr algn="l"/>
-            <a:r>
-              <a:rPr b="1" sz="2100">
-                <a:solidFill>
-                  <a:srgbClr val="FFFFFF"/>
-                </a:solidFill>
-                <a:latin typeface="Corbel"/>
-              </a:rPr>
-              <a:t>Why periodic checks fail for a lift fleet</a:t>
-            </a:r>
-          </a:p>
-        </p:txBody>
-      </p:sp>
-      <p:sp>
-        <p:nvSpPr>
-          <p:cNvPr id="3" name="Content Placeholder 2"/>
-          <p:cNvSpPr>
-            <a:spLocks noGrp="1"/>
-          </p:cNvSpPr>
-          <p:nvPr>
-            <p:ph idx="1"/>
-          </p:nvPr>
-        </p:nvSpPr>
-        <p:spPr>
-          <a:xfrm>
-            <a:off x="658368" y="1371600"/>
-            <a:ext cx="10972800" cy="5029200"/>
-          </a:xfrm>
-        </p:spPr>
-        <p:txBody>
-          <a:bodyPr wrap="square">
-            <a:normAutofit/>
-          </a:bodyPr>
-          <a:lstStyle/>
-          <a:p>
-            <a:pPr>
-              <a:spcAft>
-                <a:spcPts val="600"/>
-              </a:spcAft>
-            </a:pPr>
-            <a:r>
-              <a:rPr sz="1500" b="0">
-                <a:solidFill>
-                  <a:srgbClr val="232A26"/>
-                </a:solidFill>
-                <a:latin typeface="Calibri"/>
-              </a:rPr>
-              <a:t>Two towers, five metrics each: motor temperature, door cycles, cab vibration, load weight and travel speed. Ten live streams, some sampling every single second.</a:t>
-            </a:r>
-          </a:p>
-          <a:p>
-            <a:pPr>
-              <a:spcAft>
-                <a:spcPts val="600"/>
-              </a:spcAft>
-            </a:pPr>
-            <a:r>
-              <a:rPr sz="1500" b="0">
-                <a:solidFill>
-                  <a:srgbClr val="232A26"/>
-                </a:solidFill>
-                <a:latin typeface="Calibri"/>
-              </a:rPr>
-              <a:t>Faults build between visits. A motor drifting past 85 degrees C, or a cab crawling below 0.5 metres per second, stays invisible until an engineer is standing in front of the unit.</a:t>
-            </a:r>
-          </a:p>
-          <a:p>
-            <a:pPr>
-              <a:spcAft>
-                <a:spcPts val="600"/>
-              </a:spcAft>
-            </a:pPr>
-            <a:r>
-              <a:rPr sz="1500" b="0">
-                <a:solidFill>
-                  <a:srgbClr val="232A26"/>
-                </a:solidFill>
-                <a:latin typeface="Calibri"/>
-              </a:rPr>
-              <a:t>A clipboard round captures one moment in time; the fleet changes state every second, around the clock.</a:t>
-            </a:r>
-          </a:p>
-          <a:p>
-            <a:pPr>
-              <a:spcAft>
-                <a:spcPts val="600"/>
-              </a:spcAft>
-            </a:pPr>
-            <a:r>
-              <a:rPr sz="1500" b="1">
-                <a:solidFill>
-                  <a:srgbClr val="9A4A6A"/>
-                </a:solidFill>
-                <a:latin typeface="Calibri"/>
-              </a:rPr>
-              <a:t>The four fleet-safety rules watched continuously:</a:t>
-            </a:r>
-          </a:p>
-          <a:p>
-            <a:pPr lvl="1">
-              <a:spcAft>
-                <a:spcPts val="600"/>
-              </a:spcAft>
-            </a:pPr>
-            <a:r>
-              <a:rPr sz="1300" b="0">
-                <a:solidFill>
-                  <a:srgbClr val="232A26"/>
-                </a:solidFill>
-                <a:latin typeface="Calibri"/>
-              </a:rPr>
-              <a:t>Motor overheat: average temperature above 85 C</a:t>
-            </a:r>
-          </a:p>
-          <a:p>
-            <a:pPr lvl="1">
-              <a:spcAft>
-                <a:spcPts val="600"/>
-              </a:spcAft>
-            </a:pPr>
-            <a:r>
-              <a:rPr sz="1300" b="0">
-                <a:solidFill>
-                  <a:srgbClr val="232A26"/>
-                </a:solidFill>
-                <a:latin typeface="Calibri"/>
-              </a:rPr>
-              <a:t>Ride quality: vibration above 6 mm</a:t>
-            </a:r>
-          </a:p>
-          <a:p>
-            <a:pPr lvl="1">
-              <a:spcAft>
-                <a:spcPts val="600"/>
-              </a:spcAft>
-            </a:pPr>
-            <a:r>
-              <a:rPr sz="1300" b="0">
-                <a:solidFill>
-                  <a:srgbClr val="232A26"/>
-                </a:solidFill>
-                <a:latin typeface="Calibri"/>
-              </a:rPr>
-              <a:t>Overload: load above 1,000 kg</a:t>
-            </a:r>
-          </a:p>
-          <a:p>
-            <a:pPr lvl="1">
-              <a:spcAft>
-                <a:spcPts val="600"/>
-              </a:spcAft>
-            </a:pPr>
-            <a:r>
-              <a:rPr sz="1300" b="0">
-                <a:solidFill>
-                  <a:srgbClr val="232A26"/>
-                </a:solidFill>
-                <a:latin typeface="Calibri"/>
-              </a:rPr>
-              <a:t>Stall: speed below 0.5 m/s</a:t>
-            </a:r>
-          </a:p>
-          <a:p>
-            <a:pPr>
-              <a:spcAft>
-                <a:spcPts val="600"/>
-              </a:spcAft>
-            </a:pPr>
-            <a:r>
-              <a:rPr sz="1500" b="0">
-                <a:solidFill>
-                  <a:srgbClr val="232A26"/>
-                </a:solidFill>
-                <a:latin typeface="Calibri"/>
-              </a:rPr>
-              <a:t>Each rule fires on window aggregates, not one noisy reading.</a:t>
-            </a:r>
-          </a:p>
-        </p:txBody>
-      </p:sp>
-    </p:spTree>
-  </p:cSld>
-  <p:clrMapOvr>
-    <a:masterClrMapping/>
-  </p:clrMapOvr>
-</p:sld>
-</file>
-
-<file path=ppt/slides/slide3.xml><?xml version="1.0" encoding="utf-8"?>
-<p:sld xmlns:a="http://schemas.openxmlformats.org/drawingml/2006/main" xmlns:p="http://schemas.openxmlformats.org/presentationml/2006/main" xmlns:r="http://schemas.openxmlformats.org/officeDocument/2006/relationships">
-  <p:cSld>
-    <p:spTree>
-      <p:nvGrpSpPr>
-        <p:cNvPr id="1" name=""/>
-        <p:cNvGrpSpPr/>
-        <p:nvPr/>
-      </p:nvGrpSpPr>
-      <p:grpSpPr/>
-      <p:sp>
-        <p:nvSpPr>
-          <p:cNvPr id="4" name="Rectangle 3"/>
-          <p:cNvSpPr/>
-          <p:nvPr/>
-        </p:nvSpPr>
-        <p:spPr>
-          <a:xfrm>
-            <a:off x="0" y="0"/>
-            <a:ext cx="12191695" cy="1051560"/>
+            <a:off x="6053328" y="1554480"/>
+            <a:ext cx="27432" cy="4572000"/>
           </a:xfrm>
           <a:prstGeom prst="rect">
             <a:avLst/>
@@ -3622,222 +3627,6 @@
           </a:p>
         </p:txBody>
       </p:sp>
-      <p:sp>
-        <p:nvSpPr>
-          <p:cNvPr id="2" name="Title 1"/>
-          <p:cNvSpPr>
-            <a:spLocks noGrp="1"/>
-          </p:cNvSpPr>
-          <p:nvPr>
-            <p:ph type="title"/>
-          </p:nvPr>
-        </p:nvSpPr>
-        <p:spPr>
-          <a:xfrm>
-            <a:off x="640080" y="0"/>
-            <a:ext cx="10972800" cy="1051560"/>
-          </a:xfrm>
-        </p:spPr>
-        <p:txBody>
-          <a:bodyPr wrap="square" anchor="ctr"/>
-          <a:lstStyle/>
-          <a:p>
-            <a:pPr algn="l"/>
-            <a:r>
-              <a:rPr b="1" sz="2400">
-                <a:solidFill>
-                  <a:srgbClr val="FFFFFF"/>
-                </a:solidFill>
-                <a:latin typeface="Corbel"/>
-              </a:rPr>
-              <a:t>How it works: edge to cloud</a:t>
-            </a:r>
-          </a:p>
-        </p:txBody>
-      </p:sp>
-      <p:sp>
-        <p:nvSpPr>
-          <p:cNvPr id="3" name="Content Placeholder 2"/>
-          <p:cNvSpPr>
-            <a:spLocks noGrp="1"/>
-          </p:cNvSpPr>
-          <p:nvPr>
-            <p:ph idx="1"/>
-          </p:nvPr>
-        </p:nvSpPr>
-        <p:spPr>
-          <a:xfrm>
-            <a:off x="658368" y="1371600"/>
-            <a:ext cx="10972800" cy="5029200"/>
-          </a:xfrm>
-        </p:spPr>
-        <p:txBody>
-          <a:bodyPr wrap="square">
-            <a:normAutofit/>
-          </a:bodyPr>
-          <a:lstStyle/>
-          <a:p>
-            <a:pPr>
-              <a:spcAft>
-                <a:spcPts val="600"/>
-              </a:spcAft>
-            </a:pPr>
-            <a:r>
-              <a:rPr sz="1500" b="1">
-                <a:solidFill>
-                  <a:srgbClr val="9A4A6A"/>
-                </a:solidFill>
-                <a:latin typeface="Calibri"/>
-              </a:rPr>
-              <a:t>The pipeline runs from edge to cloud:</a:t>
-            </a:r>
-          </a:p>
-          <a:p>
-            <a:pPr lvl="1">
-              <a:spcAft>
-                <a:spcPts val="600"/>
-              </a:spcAft>
-            </a:pPr>
-            <a:r>
-              <a:rPr sz="1300" b="0">
-                <a:solidFill>
-                  <a:srgbClr val="232A26"/>
-                </a:solidFill>
-                <a:latin typeface="Calibri"/>
-              </a:rPr>
-              <a:t>Sensors: 10 units across 2 towers</a:t>
-            </a:r>
-          </a:p>
-          <a:p>
-            <a:pPr lvl="1">
-              <a:spcAft>
-                <a:spcPts val="600"/>
-              </a:spcAft>
-            </a:pPr>
-            <a:r>
-              <a:rPr sz="1300" b="0">
-                <a:solidFill>
-                  <a:srgbClr val="232A26"/>
-                </a:solidFill>
-                <a:latin typeface="Calibri"/>
-              </a:rPr>
-              <a:t>Fog node: window, aggregate, alert</a:t>
-            </a:r>
-          </a:p>
-          <a:p>
-            <a:pPr lvl="1">
-              <a:spcAft>
-                <a:spcPts val="600"/>
-              </a:spcAft>
-            </a:pPr>
-            <a:r>
-              <a:rPr sz="1300" b="0">
-                <a:solidFill>
-                  <a:srgbClr val="232A26"/>
-                </a:solidFill>
-                <a:latin typeface="Calibri"/>
-              </a:rPr>
-              <a:t>Queue: Amazon SQS</a:t>
-            </a:r>
-          </a:p>
-          <a:p>
-            <a:pPr lvl="1">
-              <a:spcAft>
-                <a:spcPts val="600"/>
-              </a:spcAft>
-            </a:pPr>
-            <a:r>
-              <a:rPr sz="1300" b="0">
-                <a:solidFill>
-                  <a:srgbClr val="232A26"/>
-                </a:solidFill>
-                <a:latin typeface="Calibri"/>
-              </a:rPr>
-              <a:t>Serverless ingest: AWS Lambda</a:t>
-            </a:r>
-          </a:p>
-          <a:p>
-            <a:pPr lvl="1">
-              <a:spcAft>
-                <a:spcPts val="600"/>
-              </a:spcAft>
-            </a:pPr>
-            <a:r>
-              <a:rPr sz="1300" b="0">
-                <a:solidFill>
-                  <a:srgbClr val="232A26"/>
-                </a:solidFill>
-                <a:latin typeface="Calibri"/>
-              </a:rPr>
-              <a:t>Store: Amazon DynamoDB</a:t>
-            </a:r>
-          </a:p>
-          <a:p>
-            <a:pPr lvl="1">
-              <a:spcAft>
-                <a:spcPts val="600"/>
-              </a:spcAft>
-            </a:pPr>
-            <a:r>
-              <a:rPr sz="1300" b="0">
-                <a:solidFill>
-                  <a:srgbClr val="232A26"/>
-                </a:solidFill>
-                <a:latin typeface="Calibri"/>
-              </a:rPr>
-              <a:t>Live dashboard: Amazon S3 and API Gateway</a:t>
-            </a:r>
-          </a:p>
-          <a:p>
-            <a:pPr>
-              <a:spcAft>
-                <a:spcPts val="600"/>
-              </a:spcAft>
-            </a:pPr>
-            <a:r>
-              <a:rPr sz="1500" b="0">
-                <a:solidFill>
-                  <a:srgbClr val="232A26"/>
-                </a:solidFill>
-                <a:latin typeface="Calibri"/>
-              </a:rPr>
-              <a:t>Raw readings stay at the edge. The fog node windows and aggregates ten streams, so only one compact message per window crosses into the cloud.</a:t>
-            </a:r>
-          </a:p>
-          <a:p>
-            <a:pPr>
-              <a:spcAft>
-                <a:spcPts val="600"/>
-              </a:spcAft>
-            </a:pPr>
-            <a:r>
-              <a:rPr sz="1500" b="0">
-                <a:solidFill>
-                  <a:srgbClr val="232A26"/>
-                </a:solidFill>
-                <a:latin typeface="Calibri"/>
-              </a:rPr>
-              <a:t>Verified end to end locally on Docker with an AWS emulator. The same AWS SDK code targets real AWS, so deployment is a single scripted step.</a:t>
-            </a:r>
-          </a:p>
-          <a:p>
-            <a:pPr>
-              <a:spcAft>
-                <a:spcPts val="600"/>
-              </a:spcAft>
-            </a:pPr>
-            <a:r>
-              <a:rPr sz="1500" b="1">
-                <a:solidFill>
-                  <a:srgbClr val="9A4A6A"/>
-                </a:solidFill>
-                <a:latin typeface="Calibri"/>
-              </a:rPr>
-              <a:t>Alerts are decided at the edge.</a:t>
-            </a:r>
-          </a:p>
-        </p:txBody>
-      </p:sp>
     </p:spTree>
   </p:cSld>
   <p:clrMapOvr>
@@ -3846,7 +3635,7 @@
 </p:sld>
 </file>
 
-<file path=ppt/slides/slide4.xml><?xml version="1.0" encoding="utf-8"?>
+<file path=ppt/slides/slide3.xml><?xml version="1.0" encoding="utf-8"?>
 <p:sld xmlns:a="http://schemas.openxmlformats.org/drawingml/2006/main" xmlns:p="http://schemas.openxmlformats.org/presentationml/2006/main" xmlns:r="http://schemas.openxmlformats.org/officeDocument/2006/relationships">
   <p:cSld>
     <p:spTree>
@@ -3858,14 +3647,253 @@
       <p:grpSpPr/>
       <p:sp>
         <p:nvSpPr>
-          <p:cNvPr id="4" name="Rectangle 3"/>
+          <p:cNvPr id="2" name="Title 1"/>
+          <p:cNvSpPr>
+            <a:spLocks noGrp="1"/>
+          </p:cNvSpPr>
+          <p:nvPr>
+            <p:ph type="title"/>
+          </p:nvPr>
+        </p:nvSpPr>
+        <p:spPr>
+          <a:xfrm>
+            <a:off x="640080" y="384048"/>
+            <a:ext cx="10972800" cy="868680"/>
+          </a:xfrm>
+        </p:spPr>
+        <p:txBody>
+          <a:bodyPr wrap="square" anchor="t"/>
+          <a:lstStyle/>
+          <a:p>
+            <a:pPr algn="l"/>
+            <a:r>
+              <a:rPr b="1" sz="2700">
+                <a:solidFill>
+                  <a:srgbClr val="9A4A6A"/>
+                </a:solidFill>
+                <a:latin typeface="Corbel"/>
+              </a:rPr>
+              <a:t>How it works: edge to cloud</a:t>
+            </a:r>
+          </a:p>
+        </p:txBody>
+      </p:sp>
+      <p:sp>
+        <p:nvSpPr>
+          <p:cNvPr id="3" name="Content Placeholder 2"/>
+          <p:cNvSpPr>
+            <a:spLocks noGrp="1"/>
+          </p:cNvSpPr>
+          <p:nvPr>
+            <p:ph idx="1" sz="half"/>
+          </p:nvPr>
+        </p:nvSpPr>
+        <p:spPr>
+          <a:xfrm>
+            <a:off x="658368" y="1481328"/>
+            <a:ext cx="4892040" cy="4846320"/>
+          </a:xfrm>
+        </p:spPr>
+        <p:txBody>
+          <a:bodyPr wrap="square">
+            <a:normAutofit/>
+          </a:bodyPr>
+          <a:lstStyle/>
+          <a:p>
+            <a:pPr>
+              <a:spcAft>
+                <a:spcPts val="800"/>
+              </a:spcAft>
+            </a:pPr>
+            <a:r>
+              <a:rPr sz="1500" b="1">
+                <a:solidFill>
+                  <a:srgbClr val="9A4A6A"/>
+                </a:solidFill>
+                <a:latin typeface="Calibri"/>
+              </a:rPr>
+              <a:t>The pipeline runs from edge to cloud:</a:t>
+            </a:r>
+          </a:p>
+          <a:p>
+            <a:pPr lvl="1">
+              <a:spcAft>
+                <a:spcPts val="800"/>
+              </a:spcAft>
+            </a:pPr>
+            <a:r>
+              <a:rPr sz="1300" b="0">
+                <a:solidFill>
+                  <a:srgbClr val="232A26"/>
+                </a:solidFill>
+                <a:latin typeface="Calibri"/>
+              </a:rPr>
+              <a:t>Sensors: 10 units across 2 towers</a:t>
+            </a:r>
+          </a:p>
+          <a:p>
+            <a:pPr lvl="1">
+              <a:spcAft>
+                <a:spcPts val="800"/>
+              </a:spcAft>
+            </a:pPr>
+            <a:r>
+              <a:rPr sz="1300" b="0">
+                <a:solidFill>
+                  <a:srgbClr val="232A26"/>
+                </a:solidFill>
+                <a:latin typeface="Calibri"/>
+              </a:rPr>
+              <a:t>Fog node: window, aggregate, alert</a:t>
+            </a:r>
+          </a:p>
+          <a:p>
+            <a:pPr lvl="1">
+              <a:spcAft>
+                <a:spcPts val="800"/>
+              </a:spcAft>
+            </a:pPr>
+            <a:r>
+              <a:rPr sz="1300" b="0">
+                <a:solidFill>
+                  <a:srgbClr val="232A26"/>
+                </a:solidFill>
+                <a:latin typeface="Calibri"/>
+              </a:rPr>
+              <a:t>Queue: Amazon SQS</a:t>
+            </a:r>
+          </a:p>
+          <a:p>
+            <a:pPr lvl="1">
+              <a:spcAft>
+                <a:spcPts val="800"/>
+              </a:spcAft>
+            </a:pPr>
+            <a:r>
+              <a:rPr sz="1300" b="0">
+                <a:solidFill>
+                  <a:srgbClr val="232A26"/>
+                </a:solidFill>
+                <a:latin typeface="Calibri"/>
+              </a:rPr>
+              <a:t>Serverless ingest: AWS Lambda</a:t>
+            </a:r>
+          </a:p>
+          <a:p>
+            <a:pPr lvl="1">
+              <a:spcAft>
+                <a:spcPts val="800"/>
+              </a:spcAft>
+            </a:pPr>
+            <a:r>
+              <a:rPr sz="1300" b="0">
+                <a:solidFill>
+                  <a:srgbClr val="232A26"/>
+                </a:solidFill>
+                <a:latin typeface="Calibri"/>
+              </a:rPr>
+              <a:t>Store: Amazon DynamoDB</a:t>
+            </a:r>
+          </a:p>
+          <a:p>
+            <a:pPr lvl="1">
+              <a:spcAft>
+                <a:spcPts val="800"/>
+              </a:spcAft>
+            </a:pPr>
+            <a:r>
+              <a:rPr sz="1300" b="0">
+                <a:solidFill>
+                  <a:srgbClr val="232A26"/>
+                </a:solidFill>
+                <a:latin typeface="Calibri"/>
+              </a:rPr>
+              <a:t>Live dashboard: Amazon S3 and API Gateway</a:t>
+            </a:r>
+          </a:p>
+        </p:txBody>
+      </p:sp>
+      <p:sp>
+        <p:nvSpPr>
+          <p:cNvPr id="4" name="Content Placeholder 3"/>
+          <p:cNvSpPr>
+            <a:spLocks noGrp="1"/>
+          </p:cNvSpPr>
+          <p:nvPr>
+            <p:ph idx="2" sz="half"/>
+          </p:nvPr>
+        </p:nvSpPr>
+        <p:spPr>
+          <a:xfrm>
+            <a:off x="6382512" y="1481328"/>
+            <a:ext cx="4892040" cy="4846320"/>
+          </a:xfrm>
+        </p:spPr>
+        <p:txBody>
+          <a:bodyPr wrap="square">
+            <a:normAutofit/>
+          </a:bodyPr>
+          <a:lstStyle/>
+          <a:p>
+            <a:pPr>
+              <a:spcAft>
+                <a:spcPts val="800"/>
+              </a:spcAft>
+            </a:pPr>
+            <a:r>
+              <a:rPr sz="1500" b="0">
+                <a:solidFill>
+                  <a:srgbClr val="232A26"/>
+                </a:solidFill>
+                <a:latin typeface="Calibri"/>
+              </a:rPr>
+              <a:t>Raw readings stay at the edge. The fog node windows and aggregates ten streams, so only one compact message per window crosses into the cloud.</a:t>
+            </a:r>
+          </a:p>
+          <a:p>
+            <a:pPr>
+              <a:spcAft>
+                <a:spcPts val="800"/>
+              </a:spcAft>
+            </a:pPr>
+            <a:r>
+              <a:rPr sz="1500" b="0">
+                <a:solidFill>
+                  <a:srgbClr val="232A26"/>
+                </a:solidFill>
+                <a:latin typeface="Calibri"/>
+              </a:rPr>
+              <a:t>Verified end to end locally on Docker with an AWS emulator. The same AWS SDK code targets real AWS, so deployment is a single scripted step.</a:t>
+            </a:r>
+          </a:p>
+          <a:p>
+            <a:pPr>
+              <a:spcAft>
+                <a:spcPts val="800"/>
+              </a:spcAft>
+            </a:pPr>
+            <a:r>
+              <a:rPr sz="1500" b="1">
+                <a:solidFill>
+                  <a:srgbClr val="9A4A6A"/>
+                </a:solidFill>
+                <a:latin typeface="Calibri"/>
+              </a:rPr>
+              <a:t>Alerts are decided at the edge.</a:t>
+            </a:r>
+          </a:p>
+        </p:txBody>
+      </p:sp>
+      <p:sp>
+        <p:nvSpPr>
+          <p:cNvPr id="5" name="Rectangle 4"/>
           <p:cNvSpPr/>
           <p:nvPr/>
         </p:nvSpPr>
         <p:spPr>
           <a:xfrm>
-            <a:off x="0" y="0"/>
-            <a:ext cx="12191695" cy="1051560"/>
+            <a:off x="658368" y="1261872"/>
+            <a:ext cx="3108960" cy="36576"/>
           </a:xfrm>
           <a:prstGeom prst="rect">
             <a:avLst/>
@@ -3902,192 +3930,14 @@
       </p:sp>
       <p:sp>
         <p:nvSpPr>
-          <p:cNvPr id="2" name="Title 1"/>
-          <p:cNvSpPr>
-            <a:spLocks noGrp="1"/>
-          </p:cNvSpPr>
-          <p:nvPr>
-            <p:ph type="title"/>
-          </p:nvPr>
+          <p:cNvPr id="6" name="Rectangle 5"/>
+          <p:cNvSpPr/>
+          <p:nvPr/>
         </p:nvSpPr>
         <p:spPr>
           <a:xfrm>
-            <a:off x="640080" y="0"/>
-            <a:ext cx="10972800" cy="1051560"/>
-          </a:xfrm>
-        </p:spPr>
-        <p:txBody>
-          <a:bodyPr wrap="square" anchor="ctr"/>
-          <a:lstStyle/>
-          <a:p>
-            <a:pPr algn="l"/>
-            <a:r>
-              <a:rPr b="1" sz="2400">
-                <a:solidFill>
-                  <a:srgbClr val="FFFFFF"/>
-                </a:solidFill>
-                <a:latin typeface="Corbel"/>
-              </a:rPr>
-              <a:t>Demonstration highlights</a:t>
-            </a:r>
-          </a:p>
-        </p:txBody>
-      </p:sp>
-      <p:sp>
-        <p:nvSpPr>
-          <p:cNvPr id="3" name="Content Placeholder 2"/>
-          <p:cNvSpPr>
-            <a:spLocks noGrp="1"/>
-          </p:cNvSpPr>
-          <p:nvPr>
-            <p:ph idx="1"/>
-          </p:nvPr>
-        </p:nvSpPr>
-        <p:spPr>
-          <a:xfrm>
-            <a:off x="658368" y="1371600"/>
-            <a:ext cx="5760720" cy="4937760"/>
-          </a:xfrm>
-        </p:spPr>
-        <p:txBody>
-          <a:bodyPr wrap="square">
-            <a:normAutofit/>
-          </a:bodyPr>
-          <a:lstStyle/>
-          <a:p>
-            <a:pPr>
-              <a:spcAft>
-                <a:spcPts val="800"/>
-              </a:spcAft>
-            </a:pPr>
-            <a:r>
-              <a:rPr sz="1500" b="0">
-                <a:solidFill>
-                  <a:srgbClr val="232A26"/>
-                </a:solidFill>
-                <a:latin typeface="Calibri"/>
-              </a:rPr>
-              <a:t>Live dashboard during a local end-to-end run.</a:t>
-            </a:r>
-          </a:p>
-          <a:p>
-            <a:pPr>
-              <a:spcAft>
-                <a:spcPts val="800"/>
-              </a:spcAft>
-            </a:pPr>
-            <a:r>
-              <a:rPr sz="1500" b="0">
-                <a:solidFill>
-                  <a:srgbClr val="232A26"/>
-                </a:solidFill>
-                <a:latin typeface="Calibri"/>
-              </a:rPr>
-              <a:t>117 automated tests pass across the sensor, fog, ingest and dashboard modules.</a:t>
-            </a:r>
-          </a:p>
-          <a:p>
-            <a:pPr>
-              <a:spcAft>
-                <a:spcPts val="800"/>
-              </a:spcAft>
-            </a:pPr>
-            <a:r>
-              <a:rPr sz="1500" b="0">
-                <a:solidFill>
-                  <a:srgbClr val="232A26"/>
-                </a:solidFill>
-                <a:latin typeface="Calibri"/>
-              </a:rPr>
-              <a:t>2,000-message burst from 32 parallel senders absorbed; the queue keeps draining under load.</a:t>
-            </a:r>
-          </a:p>
-          <a:p>
-            <a:pPr>
-              <a:spcAft>
-                <a:spcPts val="800"/>
-              </a:spcAft>
-            </a:pPr>
-            <a:r>
-              <a:rPr sz="1500" b="0">
-                <a:solidFill>
-                  <a:srgbClr val="232A26"/>
-                </a:solidFill>
-                <a:latin typeface="Calibri"/>
-              </a:rPr>
-              <a:t>4 / 4 pipeline health checks green: gateway, queue, Lambda and end-to-end freshness.</a:t>
-            </a:r>
-          </a:p>
-          <a:p>
-            <a:pPr>
-              <a:spcAft>
-                <a:spcPts val="800"/>
-              </a:spcAft>
-            </a:pPr>
-            <a:r>
-              <a:rPr sz="1500" b="1">
-                <a:solidFill>
-                  <a:srgbClr val="9A4A6A"/>
-                </a:solidFill>
-                <a:latin typeface="Calibri"/>
-              </a:rPr>
-              <a:t>Alert chips fire live when a rule trips.</a:t>
-            </a:r>
-          </a:p>
-        </p:txBody>
-      </p:sp>
-      <p:pic>
-        <p:nvPicPr>
-          <p:cNvPr id="5" name="Picture 4" descr="dashboard-desktop.png"/>
-          <p:cNvPicPr>
-            <a:picLocks noChangeAspect="1"/>
-          </p:cNvPicPr>
-          <p:nvPr/>
-        </p:nvPicPr>
-        <p:blipFill>
-          <a:blip r:embed="rId2"/>
-          <a:stretch>
-            <a:fillRect/>
-          </a:stretch>
-        </p:blipFill>
-        <p:spPr>
-          <a:xfrm>
-            <a:off x="6629400" y="1652778"/>
-            <a:ext cx="5120640" cy="4192524"/>
-          </a:xfrm>
-          <a:prstGeom prst="rect">
-            <a:avLst/>
-          </a:prstGeom>
-        </p:spPr>
-      </p:pic>
-    </p:spTree>
-  </p:cSld>
-  <p:clrMapOvr>
-    <a:masterClrMapping/>
-  </p:clrMapOvr>
-</p:sld>
-</file>
-
-<file path=ppt/slides/slide5.xml><?xml version="1.0" encoding="utf-8"?>
-<p:sld xmlns:a="http://schemas.openxmlformats.org/drawingml/2006/main" xmlns:p="http://schemas.openxmlformats.org/presentationml/2006/main" xmlns:r="http://schemas.openxmlformats.org/officeDocument/2006/relationships">
-  <p:cSld>
-    <p:spTree>
-      <p:nvGrpSpPr>
-        <p:cNvPr id="1" name=""/>
-        <p:cNvGrpSpPr/>
-        <p:nvPr/>
-      </p:nvGrpSpPr>
-      <p:grpSpPr/>
-      <p:sp>
-        <p:nvSpPr>
-          <p:cNvPr id="4" name="Rectangle 3"/>
-          <p:cNvSpPr/>
-          <p:nvPr/>
-        </p:nvSpPr>
-        <p:spPr>
-          <a:xfrm>
-            <a:off x="0" y="0"/>
-            <a:ext cx="12191695" cy="1051560"/>
+            <a:off x="6053328" y="1554480"/>
+            <a:ext cx="27432" cy="4572000"/>
           </a:xfrm>
           <a:prstGeom prst="rect">
             <a:avLst/>
@@ -4122,222 +3972,6 @@
           </a:p>
         </p:txBody>
       </p:sp>
-      <p:sp>
-        <p:nvSpPr>
-          <p:cNvPr id="2" name="Title 1"/>
-          <p:cNvSpPr>
-            <a:spLocks noGrp="1"/>
-          </p:cNvSpPr>
-          <p:nvPr>
-            <p:ph type="title"/>
-          </p:nvPr>
-        </p:nvSpPr>
-        <p:spPr>
-          <a:xfrm>
-            <a:off x="640080" y="0"/>
-            <a:ext cx="10972800" cy="1051560"/>
-          </a:xfrm>
-        </p:spPr>
-        <p:txBody>
-          <a:bodyPr wrap="square" anchor="ctr"/>
-          <a:lstStyle/>
-          <a:p>
-            <a:pPr algn="l"/>
-            <a:r>
-              <a:rPr b="1" sz="2100">
-                <a:solidFill>
-                  <a:srgbClr val="FFFFFF"/>
-                </a:solidFill>
-                <a:latin typeface="Corbel"/>
-              </a:rPr>
-              <a:t>Hardest part: did that message really send?</a:t>
-            </a:r>
-          </a:p>
-        </p:txBody>
-      </p:sp>
-      <p:sp>
-        <p:nvSpPr>
-          <p:cNvPr id="3" name="Content Placeholder 2"/>
-          <p:cNvSpPr>
-            <a:spLocks noGrp="1"/>
-          </p:cNvSpPr>
-          <p:nvPr>
-            <p:ph idx="1"/>
-          </p:nvPr>
-        </p:nvSpPr>
-        <p:spPr>
-          <a:xfrm>
-            <a:off x="658368" y="1371600"/>
-            <a:ext cx="10972800" cy="5029200"/>
-          </a:xfrm>
-        </p:spPr>
-        <p:txBody>
-          <a:bodyPr wrap="square">
-            <a:normAutofit/>
-          </a:bodyPr>
-          <a:lstStyle/>
-          <a:p>
-            <a:pPr>
-              <a:spcAft>
-                <a:spcPts val="600"/>
-              </a:spcAft>
-            </a:pPr>
-            <a:r>
-              <a:rPr sz="1500" b="0">
-                <a:solidFill>
-                  <a:srgbClr val="232A26"/>
-                </a:solidFill>
-                <a:latin typeface="Calibri"/>
-              </a:rPr>
-              <a:t>The problem: every window's aggregate is written into a Node stream that sends to Amazon SQS. The stream happily accepts the write; it never says whether that message actually reached the queue.</a:t>
-            </a:r>
-          </a:p>
-          <a:p>
-            <a:pPr>
-              <a:spcAft>
-                <a:spcPts val="600"/>
-              </a:spcAft>
-            </a:pPr>
-            <a:r>
-              <a:rPr sz="1500" b="0">
-                <a:solidFill>
-                  <a:srgbClr val="232A26"/>
-                </a:solidFill>
-                <a:latin typeface="Calibri"/>
-              </a:rPr>
-              <a:t>Why it was hard: streams report on the pipe, not the message, so there is no built-in "chunk N was delivered" signal. A stream error also tears the whole pipeline down, so one failed send could break every window after it.</a:t>
-            </a:r>
-          </a:p>
-          <a:p>
-            <a:pPr>
-              <a:spcAft>
-                <a:spcPts val="600"/>
-              </a:spcAft>
-            </a:pPr>
-            <a:r>
-              <a:rPr sz="1500" b="0">
-                <a:solidFill>
-                  <a:srgbClr val="232A26"/>
-                </a:solidFill>
-                <a:latin typeface="Calibri"/>
-              </a:rPr>
-              <a:t>The fix: tag each message with a sequence number before it enters the stream and hold a pending promise per tag. The queue sink settles exactly one promise per outcome, so a failure rejects only that caller and the stream keeps flowing.</a:t>
-            </a:r>
-          </a:p>
-          <a:p>
-            <a:pPr>
-              <a:spcAft>
-                <a:spcPts val="600"/>
-              </a:spcAft>
-            </a:pPr>
-            <a:r>
-              <a:rPr sz="1500" b="1">
-                <a:solidFill>
-                  <a:srgbClr val="9A4A6A"/>
-                </a:solidFill>
-                <a:latin typeface="Calibri"/>
-              </a:rPr>
-              <a:t>The tagged flow:</a:t>
-            </a:r>
-          </a:p>
-          <a:p>
-            <a:pPr lvl="1">
-              <a:spcAft>
-                <a:spcPts val="600"/>
-              </a:spcAft>
-            </a:pPr>
-            <a:r>
-              <a:rPr sz="1300" b="0">
-                <a:solidFill>
-                  <a:srgbClr val="232A26"/>
-                </a:solidFill>
-                <a:latin typeface="Calibri"/>
-              </a:rPr>
-              <a:t>Window aggregate, tagged ticket #42</a:t>
-            </a:r>
-          </a:p>
-          <a:p>
-            <a:pPr lvl="1">
-              <a:spcAft>
-                <a:spcPts val="600"/>
-              </a:spcAft>
-            </a:pPr>
-            <a:r>
-              <a:rPr sz="1300" b="0">
-                <a:solidFill>
-                  <a:srgbClr val="232A26"/>
-                </a:solidFill>
-                <a:latin typeface="Calibri"/>
-              </a:rPr>
-              <a:t>Stream pipeline: pass-through, queue sink</a:t>
-            </a:r>
-          </a:p>
-          <a:p>
-            <a:pPr lvl="1">
-              <a:spcAft>
-                <a:spcPts val="600"/>
-              </a:spcAft>
-            </a:pPr>
-            <a:r>
-              <a:rPr sz="1300" b="0">
-                <a:solidFill>
-                  <a:srgbClr val="232A26"/>
-                </a:solidFill>
-                <a:latin typeface="Calibri"/>
-              </a:rPr>
-              <a:t>Amazon SQS: fleet aggregates</a:t>
-            </a:r>
-          </a:p>
-          <a:p>
-            <a:pPr lvl="1">
-              <a:spcAft>
-                <a:spcPts val="600"/>
-              </a:spcAft>
-            </a:pPr>
-            <a:r>
-              <a:rPr sz="1300" b="0">
-                <a:solidFill>
-                  <a:srgbClr val="232A26"/>
-                </a:solidFill>
-                <a:latin typeface="Calibri"/>
-              </a:rPr>
-              <a:t>Ticket #42 delivered, resolved alone</a:t>
-            </a:r>
-          </a:p>
-          <a:p>
-            <a:pPr lvl="1">
-              <a:spcAft>
-                <a:spcPts val="600"/>
-              </a:spcAft>
-            </a:pPr>
-            <a:r>
-              <a:rPr sz="1300" b="0">
-                <a:solidFill>
-                  <a:srgbClr val="232A26"/>
-                </a:solidFill>
-                <a:latin typeface="Calibri"/>
-              </a:rPr>
-              <a:t>Ticket #43 failed, only #43 rejected</a:t>
-            </a:r>
-          </a:p>
-          <a:p>
-            <a:pPr>
-              <a:spcAft>
-                <a:spcPts val="600"/>
-              </a:spcAft>
-            </a:pPr>
-            <a:r>
-              <a:rPr sz="1500" b="1">
-                <a:solidFill>
-                  <a:srgbClr val="9A4A6A"/>
-                </a:solidFill>
-                <a:latin typeface="Calibri"/>
-              </a:rPr>
-              <a:t>Unit tests prove one bad send leaves every other window's publish untouched.</a:t>
-            </a:r>
-          </a:p>
-        </p:txBody>
-      </p:sp>
     </p:spTree>
   </p:cSld>
   <p:clrMapOvr>
@@ -4346,7 +3980,7 @@
 </p:sld>
 </file>
 
-<file path=ppt/slides/slide6.xml><?xml version="1.0" encoding="utf-8"?>
+<file path=ppt/slides/slide4.xml><?xml version="1.0" encoding="utf-8"?>
 <p:sld xmlns:a="http://schemas.openxmlformats.org/drawingml/2006/main" xmlns:p="http://schemas.openxmlformats.org/presentationml/2006/main" xmlns:r="http://schemas.openxmlformats.org/officeDocument/2006/relationships">
   <p:cSld>
     <p:spTree>
@@ -4358,14 +3992,150 @@
       <p:grpSpPr/>
       <p:sp>
         <p:nvSpPr>
+          <p:cNvPr id="2" name="Title 1"/>
+          <p:cNvSpPr>
+            <a:spLocks noGrp="1"/>
+          </p:cNvSpPr>
+          <p:nvPr>
+            <p:ph type="title"/>
+          </p:nvPr>
+        </p:nvSpPr>
+        <p:spPr>
+          <a:xfrm>
+            <a:off x="640080" y="384048"/>
+            <a:ext cx="10972800" cy="868680"/>
+          </a:xfrm>
+        </p:spPr>
+        <p:txBody>
+          <a:bodyPr wrap="square" anchor="t"/>
+          <a:lstStyle/>
+          <a:p>
+            <a:pPr algn="l"/>
+            <a:r>
+              <a:rPr b="1" sz="2700">
+                <a:solidFill>
+                  <a:srgbClr val="9A4A6A"/>
+                </a:solidFill>
+                <a:latin typeface="Corbel"/>
+              </a:rPr>
+              <a:t>Demonstration highlights</a:t>
+            </a:r>
+          </a:p>
+        </p:txBody>
+      </p:sp>
+      <p:sp>
+        <p:nvSpPr>
+          <p:cNvPr id="3" name="Content Placeholder 2"/>
+          <p:cNvSpPr>
+            <a:spLocks noGrp="1"/>
+          </p:cNvSpPr>
+          <p:nvPr>
+            <p:ph idx="1"/>
+          </p:nvPr>
+        </p:nvSpPr>
+        <p:spPr>
+          <a:xfrm>
+            <a:off x="658368" y="1481328"/>
+            <a:ext cx="5760720" cy="4754880"/>
+          </a:xfrm>
+        </p:spPr>
+        <p:txBody>
+          <a:bodyPr wrap="square">
+            <a:normAutofit/>
+          </a:bodyPr>
+          <a:lstStyle/>
+          <a:p>
+            <a:pPr>
+              <a:spcAft>
+                <a:spcPts val="800"/>
+              </a:spcAft>
+            </a:pPr>
+            <a:r>
+              <a:rPr sz="1500" b="0">
+                <a:solidFill>
+                  <a:srgbClr val="232A26"/>
+                </a:solidFill>
+                <a:latin typeface="Calibri"/>
+              </a:rPr>
+              <a:t>Live dashboard during a local end-to-end run.</a:t>
+            </a:r>
+          </a:p>
+          <a:p>
+            <a:pPr>
+              <a:spcAft>
+                <a:spcPts val="800"/>
+              </a:spcAft>
+            </a:pPr>
+            <a:r>
+              <a:rPr sz="1500" b="0">
+                <a:solidFill>
+                  <a:srgbClr val="232A26"/>
+                </a:solidFill>
+                <a:latin typeface="Calibri"/>
+              </a:rPr>
+              <a:t>117 automated tests pass across the sensor, fog, ingest and dashboard modules.</a:t>
+            </a:r>
+          </a:p>
+          <a:p>
+            <a:pPr>
+              <a:spcAft>
+                <a:spcPts val="800"/>
+              </a:spcAft>
+            </a:pPr>
+            <a:r>
+              <a:rPr sz="1500" b="0">
+                <a:solidFill>
+                  <a:srgbClr val="232A26"/>
+                </a:solidFill>
+                <a:latin typeface="Calibri"/>
+              </a:rPr>
+              <a:t>2,000-message burst from 32 parallel senders absorbed; the queue keeps draining under load.</a:t>
+            </a:r>
+          </a:p>
+          <a:p>
+            <a:pPr>
+              <a:spcAft>
+                <a:spcPts val="800"/>
+              </a:spcAft>
+            </a:pPr>
+            <a:r>
+              <a:rPr sz="1500" b="0">
+                <a:solidFill>
+                  <a:srgbClr val="232A26"/>
+                </a:solidFill>
+                <a:latin typeface="Calibri"/>
+              </a:rPr>
+              <a:t>4 / 4 pipeline health checks green: gateway, queue, Lambda and end-to-end freshness.</a:t>
+            </a:r>
+          </a:p>
+          <a:p>
+            <a:pPr>
+              <a:spcAft>
+                <a:spcPts val="800"/>
+              </a:spcAft>
+            </a:pPr>
+            <a:r>
+              <a:rPr sz="1500" b="1">
+                <a:solidFill>
+                  <a:srgbClr val="9A4A6A"/>
+                </a:solidFill>
+                <a:latin typeface="Calibri"/>
+              </a:rPr>
+              <a:t>Alert chips fire live when a rule trips.</a:t>
+            </a:r>
+          </a:p>
+        </p:txBody>
+      </p:sp>
+      <p:sp>
+        <p:nvSpPr>
           <p:cNvPr id="4" name="Rectangle 3"/>
           <p:cNvSpPr/>
           <p:nvPr/>
         </p:nvSpPr>
         <p:spPr>
           <a:xfrm>
-            <a:off x="0" y="0"/>
-            <a:ext cx="12191695" cy="1051560"/>
+            <a:off x="658368" y="1261872"/>
+            <a:ext cx="3108960" cy="36576"/>
           </a:xfrm>
           <a:prstGeom prst="rect">
             <a:avLst/>
@@ -4400,31 +4170,418 @@
           </a:p>
         </p:txBody>
       </p:sp>
-      <p:sp>
-        <p:nvSpPr>
-          <p:cNvPr id="2" name="Title 1"/>
-          <p:cNvSpPr>
-            <a:spLocks noGrp="1"/>
-          </p:cNvSpPr>
-          <p:nvPr>
-            <p:ph type="title"/>
-          </p:nvPr>
-        </p:nvSpPr>
+      <p:pic>
+        <p:nvPicPr>
+          <p:cNvPr id="5" name="Picture 4" descr="dashboard-desktop.png"/>
+          <p:cNvPicPr>
+            <a:picLocks noChangeAspect="1"/>
+          </p:cNvPicPr>
+          <p:nvPr/>
+        </p:nvPicPr>
+        <p:blipFill>
+          <a:blip r:embed="rId2"/>
+          <a:stretch>
+            <a:fillRect/>
+          </a:stretch>
+        </p:blipFill>
         <p:spPr>
           <a:xfrm>
-            <a:off x="640080" y="0"/>
-            <a:ext cx="10972800" cy="1051560"/>
+            <a:off x="6629400" y="1707642"/>
+            <a:ext cx="5120640" cy="4192524"/>
+          </a:xfrm>
+          <a:prstGeom prst="rect">
+            <a:avLst/>
+          </a:prstGeom>
+        </p:spPr>
+      </p:pic>
+    </p:spTree>
+  </p:cSld>
+  <p:clrMapOvr>
+    <a:masterClrMapping/>
+  </p:clrMapOvr>
+</p:sld>
+</file>
+
+<file path=ppt/slides/slide5.xml><?xml version="1.0" encoding="utf-8"?>
+<p:sld xmlns:a="http://schemas.openxmlformats.org/drawingml/2006/main" xmlns:p="http://schemas.openxmlformats.org/presentationml/2006/main" xmlns:r="http://schemas.openxmlformats.org/officeDocument/2006/relationships">
+  <p:cSld>
+    <p:spTree>
+      <p:nvGrpSpPr>
+        <p:cNvPr id="1" name=""/>
+        <p:cNvGrpSpPr/>
+        <p:nvPr/>
+      </p:nvGrpSpPr>
+      <p:grpSpPr/>
+      <p:sp>
+        <p:nvSpPr>
+          <p:cNvPr id="2" name="Title 1"/>
+          <p:cNvSpPr>
+            <a:spLocks noGrp="1"/>
+          </p:cNvSpPr>
+          <p:nvPr>
+            <p:ph type="title"/>
+          </p:nvPr>
+        </p:nvSpPr>
+        <p:spPr>
+          <a:xfrm>
+            <a:off x="640080" y="384048"/>
+            <a:ext cx="10972800" cy="868680"/>
           </a:xfrm>
         </p:spPr>
         <p:txBody>
-          <a:bodyPr wrap="square" anchor="ctr"/>
+          <a:bodyPr wrap="square" anchor="t"/>
           <a:lstStyle/>
           <a:p>
             <a:pPr algn="l"/>
             <a:r>
               <a:rPr b="1" sz="2400">
                 <a:solidFill>
-                  <a:srgbClr val="FFFFFF"/>
+                  <a:srgbClr val="9A4A6A"/>
+                </a:solidFill>
+                <a:latin typeface="Corbel"/>
+              </a:rPr>
+              <a:t>Hardest part: did that message really send?</a:t>
+            </a:r>
+          </a:p>
+        </p:txBody>
+      </p:sp>
+      <p:sp>
+        <p:nvSpPr>
+          <p:cNvPr id="3" name="Content Placeholder 2"/>
+          <p:cNvSpPr>
+            <a:spLocks noGrp="1"/>
+          </p:cNvSpPr>
+          <p:nvPr>
+            <p:ph idx="1" sz="half"/>
+          </p:nvPr>
+        </p:nvSpPr>
+        <p:spPr>
+          <a:xfrm>
+            <a:off x="658368" y="1481328"/>
+            <a:ext cx="4892040" cy="4846320"/>
+          </a:xfrm>
+        </p:spPr>
+        <p:txBody>
+          <a:bodyPr wrap="square">
+            <a:normAutofit/>
+          </a:bodyPr>
+          <a:lstStyle/>
+          <a:p>
+            <a:pPr>
+              <a:spcAft>
+                <a:spcPts val="800"/>
+              </a:spcAft>
+            </a:pPr>
+            <a:r>
+              <a:rPr sz="1500" b="0">
+                <a:solidFill>
+                  <a:srgbClr val="232A26"/>
+                </a:solidFill>
+                <a:latin typeface="Calibri"/>
+              </a:rPr>
+              <a:t>The problem: every window's aggregate is written into a Node stream that sends to Amazon SQS. The stream happily accepts the write; it never says whether that message actually reached the queue.</a:t>
+            </a:r>
+          </a:p>
+          <a:p>
+            <a:pPr>
+              <a:spcAft>
+                <a:spcPts val="800"/>
+              </a:spcAft>
+            </a:pPr>
+            <a:r>
+              <a:rPr sz="1500" b="0">
+                <a:solidFill>
+                  <a:srgbClr val="232A26"/>
+                </a:solidFill>
+                <a:latin typeface="Calibri"/>
+              </a:rPr>
+              <a:t>Why it was hard: streams report on the pipe, not the message, so there is no built-in "chunk N was delivered" signal. A stream error also tears the whole pipeline down, so one failed send could break every window after it.</a:t>
+            </a:r>
+          </a:p>
+          <a:p>
+            <a:pPr>
+              <a:spcAft>
+                <a:spcPts val="800"/>
+              </a:spcAft>
+            </a:pPr>
+            <a:r>
+              <a:rPr sz="1500" b="0">
+                <a:solidFill>
+                  <a:srgbClr val="232A26"/>
+                </a:solidFill>
+                <a:latin typeface="Calibri"/>
+              </a:rPr>
+              <a:t>The fix: tag each message with a sequence number before it enters the stream and hold a pending promise per tag. The queue sink settles exactly one promise per outcome, so a failure rejects only that caller and the stream keeps flowing.</a:t>
+            </a:r>
+          </a:p>
+          <a:p>
+            <a:pPr>
+              <a:spcAft>
+                <a:spcPts val="800"/>
+              </a:spcAft>
+            </a:pPr>
+            <a:r>
+              <a:rPr sz="1500" b="1">
+                <a:solidFill>
+                  <a:srgbClr val="9A4A6A"/>
+                </a:solidFill>
+                <a:latin typeface="Calibri"/>
+              </a:rPr>
+              <a:t>The tagged flow:</a:t>
+            </a:r>
+          </a:p>
+          <a:p>
+            <a:pPr lvl="1">
+              <a:spcAft>
+                <a:spcPts val="800"/>
+              </a:spcAft>
+            </a:pPr>
+            <a:r>
+              <a:rPr sz="1300" b="0">
+                <a:solidFill>
+                  <a:srgbClr val="232A26"/>
+                </a:solidFill>
+                <a:latin typeface="Calibri"/>
+              </a:rPr>
+              <a:t>Window aggregate, tagged ticket #42</a:t>
+            </a:r>
+          </a:p>
+          <a:p>
+            <a:pPr lvl="1">
+              <a:spcAft>
+                <a:spcPts val="800"/>
+              </a:spcAft>
+            </a:pPr>
+            <a:r>
+              <a:rPr sz="1300" b="0">
+                <a:solidFill>
+                  <a:srgbClr val="232A26"/>
+                </a:solidFill>
+                <a:latin typeface="Calibri"/>
+              </a:rPr>
+              <a:t>Stream pipeline: pass-through, queue sink</a:t>
+            </a:r>
+          </a:p>
+          <a:p>
+            <a:pPr lvl="1">
+              <a:spcAft>
+                <a:spcPts val="800"/>
+              </a:spcAft>
+            </a:pPr>
+            <a:r>
+              <a:rPr sz="1300" b="0">
+                <a:solidFill>
+                  <a:srgbClr val="232A26"/>
+                </a:solidFill>
+                <a:latin typeface="Calibri"/>
+              </a:rPr>
+              <a:t>Amazon SQS: fleet aggregates</a:t>
+            </a:r>
+          </a:p>
+          <a:p>
+            <a:pPr lvl="1">
+              <a:spcAft>
+                <a:spcPts val="800"/>
+              </a:spcAft>
+            </a:pPr>
+            <a:r>
+              <a:rPr sz="1300" b="0">
+                <a:solidFill>
+                  <a:srgbClr val="232A26"/>
+                </a:solidFill>
+                <a:latin typeface="Calibri"/>
+              </a:rPr>
+              <a:t>Ticket #42 delivered, resolved alone</a:t>
+            </a:r>
+          </a:p>
+          <a:p>
+            <a:pPr lvl="1">
+              <a:spcAft>
+                <a:spcPts val="800"/>
+              </a:spcAft>
+            </a:pPr>
+            <a:r>
+              <a:rPr sz="1300" b="0">
+                <a:solidFill>
+                  <a:srgbClr val="232A26"/>
+                </a:solidFill>
+                <a:latin typeface="Calibri"/>
+              </a:rPr>
+              <a:t>Ticket #43 failed, only #43 rejected</a:t>
+            </a:r>
+          </a:p>
+        </p:txBody>
+      </p:sp>
+      <p:sp>
+        <p:nvSpPr>
+          <p:cNvPr id="4" name="Content Placeholder 3"/>
+          <p:cNvSpPr>
+            <a:spLocks noGrp="1"/>
+          </p:cNvSpPr>
+          <p:nvPr>
+            <p:ph idx="2" sz="half"/>
+          </p:nvPr>
+        </p:nvSpPr>
+        <p:spPr>
+          <a:xfrm>
+            <a:off x="6382512" y="1481328"/>
+            <a:ext cx="4892040" cy="4846320"/>
+          </a:xfrm>
+        </p:spPr>
+        <p:txBody>
+          <a:bodyPr wrap="square">
+            <a:normAutofit/>
+          </a:bodyPr>
+          <a:lstStyle/>
+          <a:p>
+            <a:pPr>
+              <a:spcAft>
+                <a:spcPts val="800"/>
+              </a:spcAft>
+            </a:pPr>
+            <a:r>
+              <a:rPr sz="1500" b="1">
+                <a:solidFill>
+                  <a:srgbClr val="9A4A6A"/>
+                </a:solidFill>
+                <a:latin typeface="Calibri"/>
+              </a:rPr>
+              <a:t>Unit tests prove one bad send leaves every other window's publish untouched.</a:t>
+            </a:r>
+          </a:p>
+        </p:txBody>
+      </p:sp>
+      <p:sp>
+        <p:nvSpPr>
+          <p:cNvPr id="5" name="Rectangle 4"/>
+          <p:cNvSpPr/>
+          <p:nvPr/>
+        </p:nvSpPr>
+        <p:spPr>
+          <a:xfrm>
+            <a:off x="658368" y="1261872"/>
+            <a:ext cx="3108960" cy="36576"/>
+          </a:xfrm>
+          <a:prstGeom prst="rect">
+            <a:avLst/>
+          </a:prstGeom>
+          <a:solidFill>
+            <a:srgbClr val="9A4A6A"/>
+          </a:solidFill>
+          <a:ln>
+            <a:noFill/>
+          </a:ln>
+          <a:effectLst/>
+        </p:spPr>
+        <p:style>
+          <a:lnRef idx="1">
+            <a:schemeClr val="accent1"/>
+          </a:lnRef>
+          <a:fillRef idx="3">
+            <a:schemeClr val="accent1"/>
+          </a:fillRef>
+          <a:effectRef idx="2">
+            <a:schemeClr val="accent1"/>
+          </a:effectRef>
+          <a:fontRef idx="minor">
+            <a:schemeClr val="lt1"/>
+          </a:fontRef>
+        </p:style>
+        <p:txBody>
+          <a:bodyPr rtlCol="0" anchor="ctr"/>
+          <a:lstStyle/>
+          <a:p>
+            <a:pPr algn="ctr"/>
+          </a:p>
+        </p:txBody>
+      </p:sp>
+      <p:sp>
+        <p:nvSpPr>
+          <p:cNvPr id="6" name="Rectangle 5"/>
+          <p:cNvSpPr/>
+          <p:nvPr/>
+        </p:nvSpPr>
+        <p:spPr>
+          <a:xfrm>
+            <a:off x="6053328" y="1554480"/>
+            <a:ext cx="27432" cy="4572000"/>
+          </a:xfrm>
+          <a:prstGeom prst="rect">
+            <a:avLst/>
+          </a:prstGeom>
+          <a:solidFill>
+            <a:srgbClr val="9A4A6A"/>
+          </a:solidFill>
+          <a:ln>
+            <a:noFill/>
+          </a:ln>
+          <a:effectLst/>
+        </p:spPr>
+        <p:style>
+          <a:lnRef idx="1">
+            <a:schemeClr val="accent1"/>
+          </a:lnRef>
+          <a:fillRef idx="3">
+            <a:schemeClr val="accent1"/>
+          </a:fillRef>
+          <a:effectRef idx="2">
+            <a:schemeClr val="accent1"/>
+          </a:effectRef>
+          <a:fontRef idx="minor">
+            <a:schemeClr val="lt1"/>
+          </a:fontRef>
+        </p:style>
+        <p:txBody>
+          <a:bodyPr rtlCol="0" anchor="ctr"/>
+          <a:lstStyle/>
+          <a:p>
+            <a:pPr algn="ctr"/>
+          </a:p>
+        </p:txBody>
+      </p:sp>
+    </p:spTree>
+  </p:cSld>
+  <p:clrMapOvr>
+    <a:masterClrMapping/>
+  </p:clrMapOvr>
+</p:sld>
+</file>
+
+<file path=ppt/slides/slide6.xml><?xml version="1.0" encoding="utf-8"?>
+<p:sld xmlns:a="http://schemas.openxmlformats.org/drawingml/2006/main" xmlns:p="http://schemas.openxmlformats.org/presentationml/2006/main" xmlns:r="http://schemas.openxmlformats.org/officeDocument/2006/relationships">
+  <p:cSld>
+    <p:spTree>
+      <p:nvGrpSpPr>
+        <p:cNvPr id="1" name=""/>
+        <p:cNvGrpSpPr/>
+        <p:nvPr/>
+      </p:nvGrpSpPr>
+      <p:grpSpPr/>
+      <p:sp>
+        <p:nvSpPr>
+          <p:cNvPr id="2" name="Title 1"/>
+          <p:cNvSpPr>
+            <a:spLocks noGrp="1"/>
+          </p:cNvSpPr>
+          <p:nvPr>
+            <p:ph type="title"/>
+          </p:nvPr>
+        </p:nvSpPr>
+        <p:spPr>
+          <a:xfrm>
+            <a:off x="640080" y="384048"/>
+            <a:ext cx="10972800" cy="868680"/>
+          </a:xfrm>
+        </p:spPr>
+        <p:txBody>
+          <a:bodyPr wrap="square" anchor="t"/>
+          <a:lstStyle/>
+          <a:p>
+            <a:pPr algn="l"/>
+            <a:r>
+              <a:rPr b="1" sz="2700">
+                <a:solidFill>
+                  <a:srgbClr val="9A4A6A"/>
                 </a:solidFill>
                 <a:latin typeface="Corbel"/>
               </a:rPr>
@@ -4440,13 +4597,13 @@
             <a:spLocks noGrp="1"/>
           </p:cNvSpPr>
           <p:nvPr>
-            <p:ph idx="1"/>
+            <p:ph idx="1" sz="half"/>
           </p:nvPr>
         </p:nvSpPr>
         <p:spPr>
           <a:xfrm>
-            <a:off x="658368" y="1371600"/>
-            <a:ext cx="10972800" cy="5029200"/>
+            <a:off x="658368" y="1481328"/>
+            <a:ext cx="4892040" cy="4846320"/>
           </a:xfrm>
         </p:spPr>
         <p:txBody>
@@ -4457,11 +4614,11 @@
           <a:p>
             <a:pPr>
               <a:spcAft>
-                <a:spcPts val="900"/>
+                <a:spcPts val="800"/>
               </a:spcAft>
             </a:pPr>
             <a:r>
-              <a:rPr sz="1700" b="1">
+              <a:rPr sz="1500" b="1">
                 <a:solidFill>
                   <a:srgbClr val="9A4A6A"/>
                 </a:solidFill>
@@ -4473,11 +4630,11 @@
           <a:p>
             <a:pPr lvl="1">
               <a:spcAft>
-                <a:spcPts val="900"/>
+                <a:spcPts val="800"/>
               </a:spcAft>
             </a:pPr>
             <a:r>
-              <a:rPr sz="1500" b="0">
+              <a:rPr sz="1300" b="0">
                 <a:solidFill>
                   <a:srgbClr val="232A26"/>
                 </a:solidFill>
@@ -4489,11 +4646,11 @@
           <a:p>
             <a:pPr>
               <a:spcAft>
-                <a:spcPts val="900"/>
+                <a:spcPts val="800"/>
               </a:spcAft>
             </a:pPr>
             <a:r>
-              <a:rPr sz="1700" b="1">
+              <a:rPr sz="1500" b="1">
                 <a:solidFill>
                   <a:srgbClr val="9A4A6A"/>
                 </a:solidFill>
@@ -4505,11 +4662,11 @@
           <a:p>
             <a:pPr lvl="1">
               <a:spcAft>
-                <a:spcPts val="900"/>
+                <a:spcPts val="800"/>
               </a:spcAft>
             </a:pPr>
             <a:r>
-              <a:rPr sz="1500" b="0">
+              <a:rPr sz="1300" b="0">
                 <a:solidFill>
                   <a:srgbClr val="232A26"/>
                 </a:solidFill>
@@ -4518,14 +4675,37 @@
               <a:t>117 automated tests, a scripted end-to-end pipeline check, and a 2,000-message burst test back every claim on these slides.</a:t>
             </a:r>
           </a:p>
+        </p:txBody>
+      </p:sp>
+      <p:sp>
+        <p:nvSpPr>
+          <p:cNvPr id="4" name="Content Placeholder 3"/>
+          <p:cNvSpPr>
+            <a:spLocks noGrp="1"/>
+          </p:cNvSpPr>
+          <p:nvPr>
+            <p:ph idx="2" sz="half"/>
+          </p:nvPr>
+        </p:nvSpPr>
+        <p:spPr>
+          <a:xfrm>
+            <a:off x="6382512" y="1481328"/>
+            <a:ext cx="4892040" cy="4846320"/>
+          </a:xfrm>
+        </p:spPr>
+        <p:txBody>
+          <a:bodyPr wrap="square">
+            <a:normAutofit/>
+          </a:bodyPr>
+          <a:lstStyle/>
           <a:p>
             <a:pPr>
               <a:spcAft>
-                <a:spcPts val="900"/>
+                <a:spcPts val="800"/>
               </a:spcAft>
             </a:pPr>
             <a:r>
-              <a:rPr sz="1700" b="1">
+              <a:rPr sz="1500" b="1">
                 <a:solidFill>
                   <a:srgbClr val="9A4A6A"/>
                 </a:solidFill>
@@ -4537,11 +4717,11 @@
           <a:p>
             <a:pPr lvl="1">
               <a:spcAft>
-                <a:spcPts val="900"/>
+                <a:spcPts val="800"/>
               </a:spcAft>
             </a:pPr>
             <a:r>
-              <a:rPr sz="1500" b="0">
+              <a:rPr sz="1300" b="0">
                 <a:solidFill>
                   <a:srgbClr val="232A26"/>
                 </a:solidFill>
@@ -4553,11 +4733,11 @@
           <a:p>
             <a:pPr>
               <a:spcAft>
-                <a:spcPts val="900"/>
+                <a:spcPts val="800"/>
               </a:spcAft>
             </a:pPr>
             <a:r>
-              <a:rPr sz="1700" b="0">
+              <a:rPr sz="1500" b="0">
                 <a:solidFill>
                   <a:srgbClr val="232A26"/>
                 </a:solidFill>
@@ -4565,6 +4745,94 @@
               </a:rPr>
               <a:t>Thank you. Questions?</a:t>
             </a:r>
+          </a:p>
+        </p:txBody>
+      </p:sp>
+      <p:sp>
+        <p:nvSpPr>
+          <p:cNvPr id="5" name="Rectangle 4"/>
+          <p:cNvSpPr/>
+          <p:nvPr/>
+        </p:nvSpPr>
+        <p:spPr>
+          <a:xfrm>
+            <a:off x="658368" y="1261872"/>
+            <a:ext cx="3108960" cy="36576"/>
+          </a:xfrm>
+          <a:prstGeom prst="rect">
+            <a:avLst/>
+          </a:prstGeom>
+          <a:solidFill>
+            <a:srgbClr val="9A4A6A"/>
+          </a:solidFill>
+          <a:ln>
+            <a:noFill/>
+          </a:ln>
+          <a:effectLst/>
+        </p:spPr>
+        <p:style>
+          <a:lnRef idx="1">
+            <a:schemeClr val="accent1"/>
+          </a:lnRef>
+          <a:fillRef idx="3">
+            <a:schemeClr val="accent1"/>
+          </a:fillRef>
+          <a:effectRef idx="2">
+            <a:schemeClr val="accent1"/>
+          </a:effectRef>
+          <a:fontRef idx="minor">
+            <a:schemeClr val="lt1"/>
+          </a:fontRef>
+        </p:style>
+        <p:txBody>
+          <a:bodyPr rtlCol="0" anchor="ctr"/>
+          <a:lstStyle/>
+          <a:p>
+            <a:pPr algn="ctr"/>
+          </a:p>
+        </p:txBody>
+      </p:sp>
+      <p:sp>
+        <p:nvSpPr>
+          <p:cNvPr id="6" name="Rectangle 5"/>
+          <p:cNvSpPr/>
+          <p:nvPr/>
+        </p:nvSpPr>
+        <p:spPr>
+          <a:xfrm>
+            <a:off x="6053328" y="1554480"/>
+            <a:ext cx="27432" cy="4572000"/>
+          </a:xfrm>
+          <a:prstGeom prst="rect">
+            <a:avLst/>
+          </a:prstGeom>
+          <a:solidFill>
+            <a:srgbClr val="9A4A6A"/>
+          </a:solidFill>
+          <a:ln>
+            <a:noFill/>
+          </a:ln>
+          <a:effectLst/>
+        </p:spPr>
+        <p:style>
+          <a:lnRef idx="1">
+            <a:schemeClr val="accent1"/>
+          </a:lnRef>
+          <a:fillRef idx="3">
+            <a:schemeClr val="accent1"/>
+          </a:fillRef>
+          <a:effectRef idx="2">
+            <a:schemeClr val="accent1"/>
+          </a:effectRef>
+          <a:fontRef idx="minor">
+            <a:schemeClr val="lt1"/>
+          </a:fontRef>
+        </p:style>
+        <p:txBody>
+          <a:bodyPr rtlCol="0" anchor="ctr"/>
+          <a:lstStyle/>
+          <a:p>
+            <a:pPr algn="ctr"/>
           </a:p>
         </p:txBody>
       </p:sp>

--- a/ppt/elevator-escalator-fleet-monitoring.pptx
+++ b/ppt/elevator-escalator-fleet-monitoring.pptx
@@ -3102,13 +3102,13 @@
         <p:spPr>
           <a:xfrm>
             <a:off x="-91440" y="-91440"/>
-            <a:ext cx="12435840" cy="7132320"/>
+            <a:ext cx="12435840" cy="7040880"/>
           </a:xfrm>
           <a:prstGeom prst="rect">
             <a:avLst/>
           </a:prstGeom>
           <a:solidFill>
-            <a:srgbClr val="FFFFFF"/>
+            <a:srgbClr val="5A5F7A"/>
           </a:solidFill>
           <a:ln>
             <a:noFill/>
@@ -3139,20 +3139,90 @@
       </p:sp>
       <p:sp>
         <p:nvSpPr>
-          <p:cNvPr id="3" name="Rectangle 2"/>
+          <p:cNvPr id="3" name="TextBox 2"/>
+          <p:cNvSpPr txBox="1"/>
+          <p:nvPr/>
+        </p:nvSpPr>
+        <p:spPr>
+          <a:xfrm>
+            <a:off x="868680" y="1600200"/>
+            <a:ext cx="10424160" cy="2148840"/>
+          </a:xfrm>
+          <a:prstGeom prst="rect">
+            <a:avLst/>
+          </a:prstGeom>
+          <a:noFill/>
+        </p:spPr>
+        <p:txBody>
+          <a:bodyPr wrap="square" anchor="ctr">
+            <a:spAutoFit/>
+          </a:bodyPr>
+          <a:lstStyle/>
+          <a:p>
+            <a:pPr algn="l"/>
+            <a:r>
+              <a:rPr sz="3400" b="1" i="0">
+                <a:solidFill>
+                  <a:srgbClr val="FFFFFF"/>
+                </a:solidFill>
+                <a:latin typeface="Corbel"/>
+              </a:rPr>
+              <a:t>Elevator and Escalator Fleet Monitoring</a:t>
+            </a:r>
+          </a:p>
+        </p:txBody>
+      </p:sp>
+      <p:sp>
+        <p:nvSpPr>
+          <p:cNvPr id="4" name="TextBox 3"/>
+          <p:cNvSpPr txBox="1"/>
+          <p:nvPr/>
+        </p:nvSpPr>
+        <p:spPr>
+          <a:xfrm>
+            <a:off x="914400" y="3977639"/>
+            <a:ext cx="10058400" cy="640080"/>
+          </a:xfrm>
+          <a:prstGeom prst="rect">
+            <a:avLst/>
+          </a:prstGeom>
+          <a:noFill/>
+        </p:spPr>
+        <p:txBody>
+          <a:bodyPr wrap="square" anchor="t">
+            <a:spAutoFit/>
+          </a:bodyPr>
+          <a:lstStyle/>
+          <a:p>
+            <a:pPr algn="l"/>
+            <a:r>
+              <a:rPr sz="1800" b="0" i="1">
+                <a:solidFill>
+                  <a:srgbClr val="D5D7DD"/>
+                </a:solidFill>
+                <a:latin typeface="Verdana"/>
+              </a:rPr>
+              <a:t>Edge-to-cloud safety monitoring for a two-tower elevator and escalator fleet</a:t>
+            </a:r>
+          </a:p>
+        </p:txBody>
+      </p:sp>
+      <p:sp>
+        <p:nvSpPr>
+          <p:cNvPr id="5" name="Rectangle 4"/>
           <p:cNvSpPr/>
           <p:nvPr/>
         </p:nvSpPr>
         <p:spPr>
           <a:xfrm>
-            <a:off x="-91440" y="-91440"/>
-            <a:ext cx="12435840" cy="4160520"/>
+            <a:off x="-91440" y="5257800"/>
+            <a:ext cx="12435840" cy="1691640"/>
           </a:xfrm>
           <a:prstGeom prst="rect">
             <a:avLst/>
           </a:prstGeom>
           <a:solidFill>
-            <a:srgbClr val="9A4A6A"/>
+            <a:srgbClr val="373A4B"/>
           </a:solidFill>
           <a:ln>
             <a:noFill/>
@@ -3183,14 +3253,14 @@
       </p:sp>
       <p:sp>
         <p:nvSpPr>
-          <p:cNvPr id="4" name="TextBox 3"/>
+          <p:cNvPr id="6" name="TextBox 5"/>
           <p:cNvSpPr txBox="1"/>
           <p:nvPr/>
         </p:nvSpPr>
         <p:spPr>
           <a:xfrm>
-            <a:off x="914400" y="1143000"/>
-            <a:ext cx="10332720" cy="1965960"/>
+            <a:off x="868680" y="5440680"/>
+            <a:ext cx="10424160" cy="1371600"/>
           </a:xfrm>
           <a:prstGeom prst="rect">
             <a:avLst/>
@@ -3203,95 +3273,25 @@
           </a:bodyPr>
           <a:lstStyle/>
           <a:p>
-            <a:pPr algn="ctr"/>
-            <a:r>
-              <a:rPr sz="3400" b="1" i="0">
-                <a:solidFill>
-                  <a:srgbClr val="FFFFFF"/>
-                </a:solidFill>
-                <a:latin typeface="Corbel"/>
-              </a:rPr>
-              <a:t>Elevator and Escalator Fleet Monitoring</a:t>
-            </a:r>
-          </a:p>
-        </p:txBody>
-      </p:sp>
-      <p:sp>
-        <p:nvSpPr>
-          <p:cNvPr id="5" name="TextBox 4"/>
-          <p:cNvSpPr txBox="1"/>
-          <p:nvPr/>
-        </p:nvSpPr>
-        <p:spPr>
-          <a:xfrm>
-            <a:off x="1371600" y="4434840"/>
-            <a:ext cx="9418320" cy="548640"/>
-          </a:xfrm>
-          <a:prstGeom prst="rect">
-            <a:avLst/>
-          </a:prstGeom>
-          <a:noFill/>
-        </p:spPr>
-        <p:txBody>
-          <a:bodyPr wrap="square" anchor="t">
-            <a:spAutoFit/>
-          </a:bodyPr>
-          <a:lstStyle/>
-          <a:p>
-            <a:pPr algn="ctr"/>
-            <a:r>
-              <a:rPr sz="1800" b="0" i="1">
-                <a:solidFill>
-                  <a:srgbClr val="823E5A"/>
-                </a:solidFill>
-                <a:latin typeface="Calibri"/>
-              </a:rPr>
-              <a:t>Edge-to-cloud safety monitoring for a two-tower elevator and escalator fleet</a:t>
-            </a:r>
-          </a:p>
-        </p:txBody>
-      </p:sp>
-      <p:sp>
-        <p:nvSpPr>
-          <p:cNvPr id="6" name="TextBox 5"/>
-          <p:cNvSpPr txBox="1"/>
-          <p:nvPr/>
-        </p:nvSpPr>
-        <p:spPr>
-          <a:xfrm>
-            <a:off x="1371600" y="5212080"/>
-            <a:ext cx="9418320" cy="1371600"/>
-          </a:xfrm>
-          <a:prstGeom prst="rect">
-            <a:avLst/>
-          </a:prstGeom>
-          <a:noFill/>
-        </p:spPr>
-        <p:txBody>
-          <a:bodyPr wrap="square" anchor="t">
-            <a:spAutoFit/>
-          </a:bodyPr>
-          <a:lstStyle/>
-          <a:p>
-            <a:pPr algn="ctr"/>
+            <a:pPr algn="l"/>
             <a:r>
               <a:rPr sz="1250" b="0" i="0">
                 <a:solidFill>
-                  <a:srgbClr val="5A635C"/>
-                </a:solidFill>
-                <a:latin typeface="Calibri"/>
+                  <a:srgbClr val="D0D2D9"/>
+                </a:solidFill>
+                <a:latin typeface="Verdana"/>
               </a:rPr>
               <a:t>MSc in Cloud Computing   ·   Fog and Edge Computing (H9FECC)</a:t>
             </a:r>
           </a:p>
           <a:p>
-            <a:pPr algn="ctr"/>
+            <a:pPr algn="l"/>
             <a:r>
               <a:rPr sz="1250" b="0" i="0">
                 <a:solidFill>
-                  <a:srgbClr val="5A635C"/>
-                </a:solidFill>
-                <a:latin typeface="Calibri"/>
+                  <a:srgbClr val="D0D2D9"/>
+                </a:solidFill>
+                <a:latin typeface="Verdana"/>
               </a:rPr>
               <a:t>National College of Ireland</a:t>
             </a:r>
@@ -3318,243 +3318,20 @@
       <p:grpSpPr/>
       <p:sp>
         <p:nvSpPr>
-          <p:cNvPr id="2" name="Title 1"/>
-          <p:cNvSpPr>
-            <a:spLocks noGrp="1"/>
-          </p:cNvSpPr>
-          <p:nvPr>
-            <p:ph type="title"/>
-          </p:nvPr>
+          <p:cNvPr id="4" name="Rectangle 3"/>
+          <p:cNvSpPr/>
+          <p:nvPr/>
         </p:nvSpPr>
         <p:spPr>
           <a:xfrm>
-            <a:off x="640080" y="384048"/>
-            <a:ext cx="10972800" cy="868680"/>
-          </a:xfrm>
-        </p:spPr>
-        <p:txBody>
-          <a:bodyPr wrap="square" anchor="t"/>
-          <a:lstStyle/>
-          <a:p>
-            <a:pPr algn="l"/>
-            <a:r>
-              <a:rPr b="1" sz="2400">
-                <a:solidFill>
-                  <a:srgbClr val="9A4A6A"/>
-                </a:solidFill>
-                <a:latin typeface="Corbel"/>
-              </a:rPr>
-              <a:t>Why periodic checks fail for a lift fleet</a:t>
-            </a:r>
-          </a:p>
-        </p:txBody>
-      </p:sp>
-      <p:sp>
-        <p:nvSpPr>
-          <p:cNvPr id="3" name="Content Placeholder 2"/>
-          <p:cNvSpPr>
-            <a:spLocks noGrp="1"/>
-          </p:cNvSpPr>
-          <p:nvPr>
-            <p:ph idx="1" sz="half"/>
-          </p:nvPr>
-        </p:nvSpPr>
-        <p:spPr>
-          <a:xfrm>
-            <a:off x="658368" y="1481328"/>
-            <a:ext cx="4892040" cy="4846320"/>
-          </a:xfrm>
-        </p:spPr>
-        <p:txBody>
-          <a:bodyPr wrap="square">
-            <a:normAutofit/>
-          </a:bodyPr>
-          <a:lstStyle/>
-          <a:p>
-            <a:pPr>
-              <a:spcAft>
-                <a:spcPts val="800"/>
-              </a:spcAft>
-            </a:pPr>
-            <a:r>
-              <a:rPr sz="1500" b="0">
-                <a:solidFill>
-                  <a:srgbClr val="232A26"/>
-                </a:solidFill>
-                <a:latin typeface="Calibri"/>
-              </a:rPr>
-              <a:t>Two towers, five metrics each: motor temperature, door cycles, cab vibration, load weight and travel speed. Ten live streams, some sampling every single second.</a:t>
-            </a:r>
-          </a:p>
-          <a:p>
-            <a:pPr>
-              <a:spcAft>
-                <a:spcPts val="800"/>
-              </a:spcAft>
-            </a:pPr>
-            <a:r>
-              <a:rPr sz="1500" b="0">
-                <a:solidFill>
-                  <a:srgbClr val="232A26"/>
-                </a:solidFill>
-                <a:latin typeface="Calibri"/>
-              </a:rPr>
-              <a:t>Faults build between visits. A motor drifting past 85 degrees C, or a cab crawling below 0.5 metres per second, stays invisible until an engineer is standing in front of the unit.</a:t>
-            </a:r>
-          </a:p>
-          <a:p>
-            <a:pPr>
-              <a:spcAft>
-                <a:spcPts val="800"/>
-              </a:spcAft>
-            </a:pPr>
-            <a:r>
-              <a:rPr sz="1500" b="0">
-                <a:solidFill>
-                  <a:srgbClr val="232A26"/>
-                </a:solidFill>
-                <a:latin typeface="Calibri"/>
-              </a:rPr>
-              <a:t>A clipboard round captures one moment in time; the fleet changes state every second, around the clock.</a:t>
-            </a:r>
-          </a:p>
-          <a:p>
-            <a:pPr>
-              <a:spcAft>
-                <a:spcPts val="800"/>
-              </a:spcAft>
-            </a:pPr>
-            <a:r>
-              <a:rPr sz="1500" b="1">
-                <a:solidFill>
-                  <a:srgbClr val="9A4A6A"/>
-                </a:solidFill>
-                <a:latin typeface="Calibri"/>
-              </a:rPr>
-              <a:t>The four fleet-safety rules watched continuously:</a:t>
-            </a:r>
-          </a:p>
-          <a:p>
-            <a:pPr lvl="1">
-              <a:spcAft>
-                <a:spcPts val="800"/>
-              </a:spcAft>
-            </a:pPr>
-            <a:r>
-              <a:rPr sz="1300" b="0">
-                <a:solidFill>
-                  <a:srgbClr val="232A26"/>
-                </a:solidFill>
-                <a:latin typeface="Calibri"/>
-              </a:rPr>
-              <a:t>Motor overheat: average temperature above 85 C</a:t>
-            </a:r>
-          </a:p>
-          <a:p>
-            <a:pPr lvl="1">
-              <a:spcAft>
-                <a:spcPts val="800"/>
-              </a:spcAft>
-            </a:pPr>
-            <a:r>
-              <a:rPr sz="1300" b="0">
-                <a:solidFill>
-                  <a:srgbClr val="232A26"/>
-                </a:solidFill>
-                <a:latin typeface="Calibri"/>
-              </a:rPr>
-              <a:t>Ride quality: vibration above 6 mm</a:t>
-            </a:r>
-          </a:p>
-          <a:p>
-            <a:pPr lvl="1">
-              <a:spcAft>
-                <a:spcPts val="800"/>
-              </a:spcAft>
-            </a:pPr>
-            <a:r>
-              <a:rPr sz="1300" b="0">
-                <a:solidFill>
-                  <a:srgbClr val="232A26"/>
-                </a:solidFill>
-                <a:latin typeface="Calibri"/>
-              </a:rPr>
-              <a:t>Overload: load above 1,000 kg</a:t>
-            </a:r>
-          </a:p>
-          <a:p>
-            <a:pPr lvl="1">
-              <a:spcAft>
-                <a:spcPts val="800"/>
-              </a:spcAft>
-            </a:pPr>
-            <a:r>
-              <a:rPr sz="1300" b="0">
-                <a:solidFill>
-                  <a:srgbClr val="232A26"/>
-                </a:solidFill>
-                <a:latin typeface="Calibri"/>
-              </a:rPr>
-              <a:t>Stall: speed below 0.5 m/s</a:t>
-            </a:r>
-          </a:p>
-        </p:txBody>
-      </p:sp>
-      <p:sp>
-        <p:nvSpPr>
-          <p:cNvPr id="4" name="Content Placeholder 3"/>
-          <p:cNvSpPr>
-            <a:spLocks noGrp="1"/>
-          </p:cNvSpPr>
-          <p:nvPr>
-            <p:ph idx="2" sz="half"/>
-          </p:nvPr>
-        </p:nvSpPr>
-        <p:spPr>
-          <a:xfrm>
-            <a:off x="6382512" y="1481328"/>
-            <a:ext cx="4892040" cy="4846320"/>
-          </a:xfrm>
-        </p:spPr>
-        <p:txBody>
-          <a:bodyPr wrap="square">
-            <a:normAutofit/>
-          </a:bodyPr>
-          <a:lstStyle/>
-          <a:p>
-            <a:pPr>
-              <a:spcAft>
-                <a:spcPts val="800"/>
-              </a:spcAft>
-            </a:pPr>
-            <a:r>
-              <a:rPr sz="1500" b="0">
-                <a:solidFill>
-                  <a:srgbClr val="232A26"/>
-                </a:solidFill>
-                <a:latin typeface="Calibri"/>
-              </a:rPr>
-              <a:t>Each rule fires on window aggregates, not one noisy reading.</a:t>
-            </a:r>
-          </a:p>
-        </p:txBody>
-      </p:sp>
-      <p:sp>
-        <p:nvSpPr>
-          <p:cNvPr id="5" name="Rectangle 4"/>
-          <p:cNvSpPr/>
-          <p:nvPr/>
-        </p:nvSpPr>
-        <p:spPr>
-          <a:xfrm>
-            <a:off x="658368" y="1261872"/>
-            <a:ext cx="3108960" cy="36576"/>
+            <a:off x="0" y="0"/>
+            <a:ext cx="4114800" cy="6858000"/>
           </a:xfrm>
           <a:prstGeom prst="rect">
             <a:avLst/>
           </a:prstGeom>
           <a:solidFill>
-            <a:srgbClr val="9A4A6A"/>
+            <a:srgbClr val="5A5F7A"/>
           </a:solidFill>
           <a:ln>
             <a:noFill/>
@@ -3585,20 +3362,273 @@
       </p:sp>
       <p:sp>
         <p:nvSpPr>
-          <p:cNvPr id="6" name="Rectangle 5"/>
+          <p:cNvPr id="2" name="Title 1"/>
+          <p:cNvSpPr>
+            <a:spLocks noGrp="1"/>
+          </p:cNvSpPr>
+          <p:nvPr>
+            <p:ph type="title"/>
+          </p:nvPr>
+        </p:nvSpPr>
+        <p:spPr>
+          <a:xfrm>
+            <a:off x="457200" y="640080"/>
+            <a:ext cx="3291840" cy="4572000"/>
+          </a:xfrm>
+        </p:spPr>
+        <p:txBody>
+          <a:bodyPr wrap="square" anchor="t"/>
+          <a:lstStyle/>
+          <a:p>
+            <a:pPr algn="l"/>
+            <a:r>
+              <a:rPr b="1" sz="1800">
+                <a:solidFill>
+                  <a:srgbClr val="FFFFFF"/>
+                </a:solidFill>
+                <a:latin typeface="Corbel"/>
+              </a:rPr>
+              <a:t>Why periodic checks fail for a lift fleet</a:t>
+            </a:r>
+          </a:p>
+        </p:txBody>
+      </p:sp>
+      <p:sp>
+        <p:nvSpPr>
+          <p:cNvPr id="3" name="Content Placeholder 2"/>
+          <p:cNvSpPr>
+            <a:spLocks noGrp="1"/>
+          </p:cNvSpPr>
+          <p:nvPr>
+            <p:ph idx="1"/>
+          </p:nvPr>
+        </p:nvSpPr>
+        <p:spPr>
+          <a:xfrm>
+            <a:off x="4572000" y="640080"/>
+            <a:ext cx="6492240" cy="5577840"/>
+          </a:xfrm>
+        </p:spPr>
+        <p:txBody>
+          <a:bodyPr wrap="square">
+            <a:normAutofit/>
+          </a:bodyPr>
+          <a:lstStyle/>
+          <a:p>
+            <a:pPr>
+              <a:spcAft>
+                <a:spcPts val="600"/>
+              </a:spcAft>
+            </a:pPr>
+            <a:r>
+              <a:rPr sz="1500" b="0">
+                <a:solidFill>
+                  <a:srgbClr val="232A26"/>
+                </a:solidFill>
+                <a:latin typeface="Verdana"/>
+              </a:rPr>
+              <a:t>Two towers, five metrics each: motor temperature, door cycles, cab vibration, load weight and travel speed. Ten live streams, some sampling every single second.</a:t>
+            </a:r>
+          </a:p>
+          <a:p>
+            <a:pPr>
+              <a:spcAft>
+                <a:spcPts val="600"/>
+              </a:spcAft>
+            </a:pPr>
+            <a:r>
+              <a:rPr sz="1500" b="0">
+                <a:solidFill>
+                  <a:srgbClr val="232A26"/>
+                </a:solidFill>
+                <a:latin typeface="Verdana"/>
+              </a:rPr>
+              <a:t>Faults build between visits. A motor drifting past 85 degrees C, or a cab crawling below 0.5 metres per second, stays invisible until an engineer is standing in front of the unit.</a:t>
+            </a:r>
+          </a:p>
+          <a:p>
+            <a:pPr>
+              <a:spcAft>
+                <a:spcPts val="600"/>
+              </a:spcAft>
+            </a:pPr>
+            <a:r>
+              <a:rPr sz="1500" b="0">
+                <a:solidFill>
+                  <a:srgbClr val="232A26"/>
+                </a:solidFill>
+                <a:latin typeface="Verdana"/>
+              </a:rPr>
+              <a:t>A clipboard round captures one moment in time; the fleet changes state every second, around the clock.</a:t>
+            </a:r>
+          </a:p>
+          <a:p>
+            <a:pPr>
+              <a:spcAft>
+                <a:spcPts val="600"/>
+              </a:spcAft>
+            </a:pPr>
+            <a:r>
+              <a:rPr sz="1500" b="0">
+                <a:solidFill>
+                  <a:srgbClr val="232A26"/>
+                </a:solidFill>
+                <a:latin typeface="Verdana"/>
+              </a:rPr>
+              <a:t>The four fleet-safety rules watched continuously:</a:t>
+            </a:r>
+          </a:p>
+          <a:p>
+            <a:pPr lvl="1">
+              <a:spcAft>
+                <a:spcPts val="600"/>
+              </a:spcAft>
+            </a:pPr>
+            <a:r>
+              <a:rPr sz="1300" b="0">
+                <a:solidFill>
+                  <a:srgbClr val="232A26"/>
+                </a:solidFill>
+                <a:latin typeface="Verdana"/>
+              </a:rPr>
+              <a:t>Motor overheat: average temperature above 85 C</a:t>
+            </a:r>
+          </a:p>
+          <a:p>
+            <a:pPr lvl="1">
+              <a:spcAft>
+                <a:spcPts val="600"/>
+              </a:spcAft>
+            </a:pPr>
+            <a:r>
+              <a:rPr sz="1300" b="0">
+                <a:solidFill>
+                  <a:srgbClr val="232A26"/>
+                </a:solidFill>
+                <a:latin typeface="Verdana"/>
+              </a:rPr>
+              <a:t>Ride quality: vibration above 6 mm</a:t>
+            </a:r>
+          </a:p>
+          <a:p>
+            <a:pPr lvl="1">
+              <a:spcAft>
+                <a:spcPts val="600"/>
+              </a:spcAft>
+            </a:pPr>
+            <a:r>
+              <a:rPr sz="1300" b="0">
+                <a:solidFill>
+                  <a:srgbClr val="232A26"/>
+                </a:solidFill>
+                <a:latin typeface="Verdana"/>
+              </a:rPr>
+              <a:t>Overload: load above 1,000 kg</a:t>
+            </a:r>
+          </a:p>
+          <a:p>
+            <a:pPr lvl="1">
+              <a:spcAft>
+                <a:spcPts val="600"/>
+              </a:spcAft>
+            </a:pPr>
+            <a:r>
+              <a:rPr sz="1300" b="0">
+                <a:solidFill>
+                  <a:srgbClr val="232A26"/>
+                </a:solidFill>
+                <a:latin typeface="Verdana"/>
+              </a:rPr>
+              <a:t>Stall: speed below 0.5 m/s</a:t>
+            </a:r>
+          </a:p>
+          <a:p>
+            <a:pPr>
+              <a:spcAft>
+                <a:spcPts val="600"/>
+              </a:spcAft>
+            </a:pPr>
+            <a:r>
+              <a:rPr sz="1500" b="0">
+                <a:solidFill>
+                  <a:srgbClr val="232A26"/>
+                </a:solidFill>
+                <a:latin typeface="Verdana"/>
+              </a:rPr>
+              <a:t>Each rule fires on window aggregates, not one noisy reading.</a:t>
+            </a:r>
+          </a:p>
+        </p:txBody>
+      </p:sp>
+      <p:sp>
+        <p:nvSpPr>
+          <p:cNvPr id="5" name="TextBox 4"/>
+          <p:cNvSpPr txBox="1"/>
+          <p:nvPr/>
+        </p:nvSpPr>
+        <p:spPr>
+          <a:xfrm>
+            <a:off x="502920" y="6126480"/>
+            <a:ext cx="1097280" cy="457200"/>
+          </a:xfrm>
+          <a:prstGeom prst="rect">
+            <a:avLst/>
+          </a:prstGeom>
+          <a:noFill/>
+        </p:spPr>
+        <p:txBody>
+          <a:bodyPr wrap="square" anchor="t">
+            <a:spAutoFit/>
+          </a:bodyPr>
+          <a:lstStyle/>
+          <a:p>
+            <a:pPr algn="l"/>
+            <a:r>
+              <a:rPr sz="1400" b="1" i="0">
+                <a:solidFill>
+                  <a:srgbClr val="FFFFFF"/>
+                </a:solidFill>
+                <a:latin typeface="Corbel"/>
+              </a:rPr>
+              <a:t>01</a:t>
+            </a:r>
+          </a:p>
+        </p:txBody>
+      </p:sp>
+    </p:spTree>
+  </p:cSld>
+  <p:clrMapOvr>
+    <a:masterClrMapping/>
+  </p:clrMapOvr>
+</p:sld>
+</file>
+
+<file path=ppt/slides/slide3.xml><?xml version="1.0" encoding="utf-8"?>
+<p:sld xmlns:a="http://schemas.openxmlformats.org/drawingml/2006/main" xmlns:p="http://schemas.openxmlformats.org/presentationml/2006/main" xmlns:r="http://schemas.openxmlformats.org/officeDocument/2006/relationships">
+  <p:cSld>
+    <p:spTree>
+      <p:nvGrpSpPr>
+        <p:cNvPr id="1" name=""/>
+        <p:cNvGrpSpPr/>
+        <p:nvPr/>
+      </p:nvGrpSpPr>
+      <p:grpSpPr/>
+      <p:sp>
+        <p:nvSpPr>
+          <p:cNvPr id="4" name="Rectangle 3"/>
           <p:cNvSpPr/>
           <p:nvPr/>
         </p:nvSpPr>
         <p:spPr>
           <a:xfrm>
-            <a:off x="6053328" y="1554480"/>
-            <a:ext cx="27432" cy="4572000"/>
+            <a:off x="0" y="0"/>
+            <a:ext cx="4114800" cy="6858000"/>
           </a:xfrm>
           <a:prstGeom prst="rect">
             <a:avLst/>
           </a:prstGeom>
           <a:solidFill>
-            <a:srgbClr val="9A4A6A"/>
+            <a:srgbClr val="5A5F7A"/>
           </a:solidFill>
           <a:ln>
             <a:noFill/>
@@ -3627,6 +3657,257 @@
           </a:p>
         </p:txBody>
       </p:sp>
+      <p:sp>
+        <p:nvSpPr>
+          <p:cNvPr id="2" name="Title 1"/>
+          <p:cNvSpPr>
+            <a:spLocks noGrp="1"/>
+          </p:cNvSpPr>
+          <p:nvPr>
+            <p:ph type="title"/>
+          </p:nvPr>
+        </p:nvSpPr>
+        <p:spPr>
+          <a:xfrm>
+            <a:off x="457200" y="640080"/>
+            <a:ext cx="3291840" cy="4572000"/>
+          </a:xfrm>
+        </p:spPr>
+        <p:txBody>
+          <a:bodyPr wrap="square" anchor="t"/>
+          <a:lstStyle/>
+          <a:p>
+            <a:pPr algn="l"/>
+            <a:r>
+              <a:rPr b="1" sz="2200">
+                <a:solidFill>
+                  <a:srgbClr val="FFFFFF"/>
+                </a:solidFill>
+                <a:latin typeface="Corbel"/>
+              </a:rPr>
+              <a:t>How it works: edge to cloud</a:t>
+            </a:r>
+          </a:p>
+        </p:txBody>
+      </p:sp>
+      <p:sp>
+        <p:nvSpPr>
+          <p:cNvPr id="3" name="Content Placeholder 2"/>
+          <p:cNvSpPr>
+            <a:spLocks noGrp="1"/>
+          </p:cNvSpPr>
+          <p:nvPr>
+            <p:ph idx="1"/>
+          </p:nvPr>
+        </p:nvSpPr>
+        <p:spPr>
+          <a:xfrm>
+            <a:off x="4572000" y="640080"/>
+            <a:ext cx="6492240" cy="5577840"/>
+          </a:xfrm>
+        </p:spPr>
+        <p:txBody>
+          <a:bodyPr wrap="square">
+            <a:normAutofit/>
+          </a:bodyPr>
+          <a:lstStyle/>
+          <a:p>
+            <a:pPr>
+              <a:spcAft>
+                <a:spcPts val="600"/>
+              </a:spcAft>
+            </a:pPr>
+            <a:r>
+              <a:rPr sz="1500" b="0">
+                <a:solidFill>
+                  <a:srgbClr val="232A26"/>
+                </a:solidFill>
+                <a:latin typeface="Verdana"/>
+              </a:rPr>
+              <a:t>The pipeline runs from edge to cloud:</a:t>
+            </a:r>
+          </a:p>
+          <a:p>
+            <a:pPr lvl="1">
+              <a:spcAft>
+                <a:spcPts val="600"/>
+              </a:spcAft>
+            </a:pPr>
+            <a:r>
+              <a:rPr sz="1300" b="0">
+                <a:solidFill>
+                  <a:srgbClr val="232A26"/>
+                </a:solidFill>
+                <a:latin typeface="Verdana"/>
+              </a:rPr>
+              <a:t>Sensors: 10 units across 2 towers</a:t>
+            </a:r>
+          </a:p>
+          <a:p>
+            <a:pPr lvl="1">
+              <a:spcAft>
+                <a:spcPts val="600"/>
+              </a:spcAft>
+            </a:pPr>
+            <a:r>
+              <a:rPr sz="1300" b="0">
+                <a:solidFill>
+                  <a:srgbClr val="232A26"/>
+                </a:solidFill>
+                <a:latin typeface="Verdana"/>
+              </a:rPr>
+              <a:t>Fog node: window, aggregate, alert</a:t>
+            </a:r>
+          </a:p>
+          <a:p>
+            <a:pPr lvl="1">
+              <a:spcAft>
+                <a:spcPts val="600"/>
+              </a:spcAft>
+            </a:pPr>
+            <a:r>
+              <a:rPr sz="1300" b="0">
+                <a:solidFill>
+                  <a:srgbClr val="232A26"/>
+                </a:solidFill>
+                <a:latin typeface="Verdana"/>
+              </a:rPr>
+              <a:t>Queue: Amazon SQS</a:t>
+            </a:r>
+          </a:p>
+          <a:p>
+            <a:pPr lvl="1">
+              <a:spcAft>
+                <a:spcPts val="600"/>
+              </a:spcAft>
+            </a:pPr>
+            <a:r>
+              <a:rPr sz="1300" b="0">
+                <a:solidFill>
+                  <a:srgbClr val="232A26"/>
+                </a:solidFill>
+                <a:latin typeface="Verdana"/>
+              </a:rPr>
+              <a:t>Serverless ingest: AWS Lambda</a:t>
+            </a:r>
+          </a:p>
+          <a:p>
+            <a:pPr lvl="1">
+              <a:spcAft>
+                <a:spcPts val="600"/>
+              </a:spcAft>
+            </a:pPr>
+            <a:r>
+              <a:rPr sz="1300" b="0">
+                <a:solidFill>
+                  <a:srgbClr val="232A26"/>
+                </a:solidFill>
+                <a:latin typeface="Verdana"/>
+              </a:rPr>
+              <a:t>Store: Amazon DynamoDB</a:t>
+            </a:r>
+          </a:p>
+          <a:p>
+            <a:pPr lvl="1">
+              <a:spcAft>
+                <a:spcPts val="600"/>
+              </a:spcAft>
+            </a:pPr>
+            <a:r>
+              <a:rPr sz="1300" b="0">
+                <a:solidFill>
+                  <a:srgbClr val="232A26"/>
+                </a:solidFill>
+                <a:latin typeface="Verdana"/>
+              </a:rPr>
+              <a:t>Live dashboard: Amazon S3 and API Gateway</a:t>
+            </a:r>
+          </a:p>
+          <a:p>
+            <a:pPr>
+              <a:spcAft>
+                <a:spcPts val="600"/>
+              </a:spcAft>
+            </a:pPr>
+            <a:r>
+              <a:rPr sz="1500" b="0">
+                <a:solidFill>
+                  <a:srgbClr val="232A26"/>
+                </a:solidFill>
+                <a:latin typeface="Verdana"/>
+              </a:rPr>
+              <a:t>Raw readings stay at the edge. The fog node windows and aggregates ten streams, so only one compact message per window crosses into the cloud.</a:t>
+            </a:r>
+          </a:p>
+          <a:p>
+            <a:pPr>
+              <a:spcAft>
+                <a:spcPts val="600"/>
+              </a:spcAft>
+            </a:pPr>
+            <a:r>
+              <a:rPr sz="1500" b="0">
+                <a:solidFill>
+                  <a:srgbClr val="232A26"/>
+                </a:solidFill>
+                <a:latin typeface="Verdana"/>
+              </a:rPr>
+              <a:t>Verified end to end locally on Docker with an AWS emulator. The same AWS SDK code targets real AWS, so deployment is a single scripted step.</a:t>
+            </a:r>
+          </a:p>
+          <a:p>
+            <a:pPr>
+              <a:spcAft>
+                <a:spcPts val="600"/>
+              </a:spcAft>
+            </a:pPr>
+            <a:r>
+              <a:rPr sz="1500" b="0">
+                <a:solidFill>
+                  <a:srgbClr val="232A26"/>
+                </a:solidFill>
+                <a:latin typeface="Verdana"/>
+              </a:rPr>
+              <a:t>Alerts are decided at the edge.</a:t>
+            </a:r>
+          </a:p>
+        </p:txBody>
+      </p:sp>
+      <p:sp>
+        <p:nvSpPr>
+          <p:cNvPr id="5" name="TextBox 4"/>
+          <p:cNvSpPr txBox="1"/>
+          <p:nvPr/>
+        </p:nvSpPr>
+        <p:spPr>
+          <a:xfrm>
+            <a:off x="502920" y="6126480"/>
+            <a:ext cx="1097280" cy="457200"/>
+          </a:xfrm>
+          <a:prstGeom prst="rect">
+            <a:avLst/>
+          </a:prstGeom>
+          <a:noFill/>
+        </p:spPr>
+        <p:txBody>
+          <a:bodyPr wrap="square" anchor="t">
+            <a:spAutoFit/>
+          </a:bodyPr>
+          <a:lstStyle/>
+          <a:p>
+            <a:pPr algn="l"/>
+            <a:r>
+              <a:rPr sz="1400" b="1" i="0">
+                <a:solidFill>
+                  <a:srgbClr val="FFFFFF"/>
+                </a:solidFill>
+                <a:latin typeface="Corbel"/>
+              </a:rPr>
+              <a:t>02</a:t>
+            </a:r>
+          </a:p>
+        </p:txBody>
+      </p:sp>
     </p:spTree>
   </p:cSld>
   <p:clrMapOvr>
@@ -3635,7 +3916,7 @@
 </p:sld>
 </file>
 
-<file path=ppt/slides/slide3.xml><?xml version="1.0" encoding="utf-8"?>
+<file path=ppt/slides/slide4.xml><?xml version="1.0" encoding="utf-8"?>
 <p:sld xmlns:a="http://schemas.openxmlformats.org/drawingml/2006/main" xmlns:p="http://schemas.openxmlformats.org/presentationml/2006/main" xmlns:r="http://schemas.openxmlformats.org/officeDocument/2006/relationships">
   <p:cSld>
     <p:spTree>
@@ -3647,259 +3928,20 @@
       <p:grpSpPr/>
       <p:sp>
         <p:nvSpPr>
-          <p:cNvPr id="2" name="Title 1"/>
-          <p:cNvSpPr>
-            <a:spLocks noGrp="1"/>
-          </p:cNvSpPr>
-          <p:nvPr>
-            <p:ph type="title"/>
-          </p:nvPr>
+          <p:cNvPr id="4" name="Rectangle 3"/>
+          <p:cNvSpPr/>
+          <p:nvPr/>
         </p:nvSpPr>
         <p:spPr>
           <a:xfrm>
-            <a:off x="640080" y="384048"/>
-            <a:ext cx="10972800" cy="868680"/>
-          </a:xfrm>
-        </p:spPr>
-        <p:txBody>
-          <a:bodyPr wrap="square" anchor="t"/>
-          <a:lstStyle/>
-          <a:p>
-            <a:pPr algn="l"/>
-            <a:r>
-              <a:rPr b="1" sz="2700">
-                <a:solidFill>
-                  <a:srgbClr val="9A4A6A"/>
-                </a:solidFill>
-                <a:latin typeface="Corbel"/>
-              </a:rPr>
-              <a:t>How it works: edge to cloud</a:t>
-            </a:r>
-          </a:p>
-        </p:txBody>
-      </p:sp>
-      <p:sp>
-        <p:nvSpPr>
-          <p:cNvPr id="3" name="Content Placeholder 2"/>
-          <p:cNvSpPr>
-            <a:spLocks noGrp="1"/>
-          </p:cNvSpPr>
-          <p:nvPr>
-            <p:ph idx="1" sz="half"/>
-          </p:nvPr>
-        </p:nvSpPr>
-        <p:spPr>
-          <a:xfrm>
-            <a:off x="658368" y="1481328"/>
-            <a:ext cx="4892040" cy="4846320"/>
-          </a:xfrm>
-        </p:spPr>
-        <p:txBody>
-          <a:bodyPr wrap="square">
-            <a:normAutofit/>
-          </a:bodyPr>
-          <a:lstStyle/>
-          <a:p>
-            <a:pPr>
-              <a:spcAft>
-                <a:spcPts val="800"/>
-              </a:spcAft>
-            </a:pPr>
-            <a:r>
-              <a:rPr sz="1500" b="1">
-                <a:solidFill>
-                  <a:srgbClr val="9A4A6A"/>
-                </a:solidFill>
-                <a:latin typeface="Calibri"/>
-              </a:rPr>
-              <a:t>The pipeline runs from edge to cloud:</a:t>
-            </a:r>
-          </a:p>
-          <a:p>
-            <a:pPr lvl="1">
-              <a:spcAft>
-                <a:spcPts val="800"/>
-              </a:spcAft>
-            </a:pPr>
-            <a:r>
-              <a:rPr sz="1300" b="0">
-                <a:solidFill>
-                  <a:srgbClr val="232A26"/>
-                </a:solidFill>
-                <a:latin typeface="Calibri"/>
-              </a:rPr>
-              <a:t>Sensors: 10 units across 2 towers</a:t>
-            </a:r>
-          </a:p>
-          <a:p>
-            <a:pPr lvl="1">
-              <a:spcAft>
-                <a:spcPts val="800"/>
-              </a:spcAft>
-            </a:pPr>
-            <a:r>
-              <a:rPr sz="1300" b="0">
-                <a:solidFill>
-                  <a:srgbClr val="232A26"/>
-                </a:solidFill>
-                <a:latin typeface="Calibri"/>
-              </a:rPr>
-              <a:t>Fog node: window, aggregate, alert</a:t>
-            </a:r>
-          </a:p>
-          <a:p>
-            <a:pPr lvl="1">
-              <a:spcAft>
-                <a:spcPts val="800"/>
-              </a:spcAft>
-            </a:pPr>
-            <a:r>
-              <a:rPr sz="1300" b="0">
-                <a:solidFill>
-                  <a:srgbClr val="232A26"/>
-                </a:solidFill>
-                <a:latin typeface="Calibri"/>
-              </a:rPr>
-              <a:t>Queue: Amazon SQS</a:t>
-            </a:r>
-          </a:p>
-          <a:p>
-            <a:pPr lvl="1">
-              <a:spcAft>
-                <a:spcPts val="800"/>
-              </a:spcAft>
-            </a:pPr>
-            <a:r>
-              <a:rPr sz="1300" b="0">
-                <a:solidFill>
-                  <a:srgbClr val="232A26"/>
-                </a:solidFill>
-                <a:latin typeface="Calibri"/>
-              </a:rPr>
-              <a:t>Serverless ingest: AWS Lambda</a:t>
-            </a:r>
-          </a:p>
-          <a:p>
-            <a:pPr lvl="1">
-              <a:spcAft>
-                <a:spcPts val="800"/>
-              </a:spcAft>
-            </a:pPr>
-            <a:r>
-              <a:rPr sz="1300" b="0">
-                <a:solidFill>
-                  <a:srgbClr val="232A26"/>
-                </a:solidFill>
-                <a:latin typeface="Calibri"/>
-              </a:rPr>
-              <a:t>Store: Amazon DynamoDB</a:t>
-            </a:r>
-          </a:p>
-          <a:p>
-            <a:pPr lvl="1">
-              <a:spcAft>
-                <a:spcPts val="800"/>
-              </a:spcAft>
-            </a:pPr>
-            <a:r>
-              <a:rPr sz="1300" b="0">
-                <a:solidFill>
-                  <a:srgbClr val="232A26"/>
-                </a:solidFill>
-                <a:latin typeface="Calibri"/>
-              </a:rPr>
-              <a:t>Live dashboard: Amazon S3 and API Gateway</a:t>
-            </a:r>
-          </a:p>
-        </p:txBody>
-      </p:sp>
-      <p:sp>
-        <p:nvSpPr>
-          <p:cNvPr id="4" name="Content Placeholder 3"/>
-          <p:cNvSpPr>
-            <a:spLocks noGrp="1"/>
-          </p:cNvSpPr>
-          <p:nvPr>
-            <p:ph idx="2" sz="half"/>
-          </p:nvPr>
-        </p:nvSpPr>
-        <p:spPr>
-          <a:xfrm>
-            <a:off x="6382512" y="1481328"/>
-            <a:ext cx="4892040" cy="4846320"/>
-          </a:xfrm>
-        </p:spPr>
-        <p:txBody>
-          <a:bodyPr wrap="square">
-            <a:normAutofit/>
-          </a:bodyPr>
-          <a:lstStyle/>
-          <a:p>
-            <a:pPr>
-              <a:spcAft>
-                <a:spcPts val="800"/>
-              </a:spcAft>
-            </a:pPr>
-            <a:r>
-              <a:rPr sz="1500" b="0">
-                <a:solidFill>
-                  <a:srgbClr val="232A26"/>
-                </a:solidFill>
-                <a:latin typeface="Calibri"/>
-              </a:rPr>
-              <a:t>Raw readings stay at the edge. The fog node windows and aggregates ten streams, so only one compact message per window crosses into the cloud.</a:t>
-            </a:r>
-          </a:p>
-          <a:p>
-            <a:pPr>
-              <a:spcAft>
-                <a:spcPts val="800"/>
-              </a:spcAft>
-            </a:pPr>
-            <a:r>
-              <a:rPr sz="1500" b="0">
-                <a:solidFill>
-                  <a:srgbClr val="232A26"/>
-                </a:solidFill>
-                <a:latin typeface="Calibri"/>
-              </a:rPr>
-              <a:t>Verified end to end locally on Docker with an AWS emulator. The same AWS SDK code targets real AWS, so deployment is a single scripted step.</a:t>
-            </a:r>
-          </a:p>
-          <a:p>
-            <a:pPr>
-              <a:spcAft>
-                <a:spcPts val="800"/>
-              </a:spcAft>
-            </a:pPr>
-            <a:r>
-              <a:rPr sz="1500" b="1">
-                <a:solidFill>
-                  <a:srgbClr val="9A4A6A"/>
-                </a:solidFill>
-                <a:latin typeface="Calibri"/>
-              </a:rPr>
-              <a:t>Alerts are decided at the edge.</a:t>
-            </a:r>
-          </a:p>
-        </p:txBody>
-      </p:sp>
-      <p:sp>
-        <p:nvSpPr>
-          <p:cNvPr id="5" name="Rectangle 4"/>
-          <p:cNvSpPr/>
-          <p:nvPr/>
-        </p:nvSpPr>
-        <p:spPr>
-          <a:xfrm>
-            <a:off x="658368" y="1261872"/>
-            <a:ext cx="3108960" cy="36576"/>
+            <a:off x="0" y="0"/>
+            <a:ext cx="4114800" cy="6858000"/>
           </a:xfrm>
           <a:prstGeom prst="rect">
             <a:avLst/>
           </a:prstGeom>
           <a:solidFill>
-            <a:srgbClr val="9A4A6A"/>
+            <a:srgbClr val="5A5F7A"/>
           </a:solidFill>
           <a:ln>
             <a:noFill/>
@@ -3930,113 +3972,51 @@
       </p:sp>
       <p:sp>
         <p:nvSpPr>
-          <p:cNvPr id="6" name="Rectangle 5"/>
-          <p:cNvSpPr/>
-          <p:nvPr/>
+          <p:cNvPr id="2" name="Title 1"/>
+          <p:cNvSpPr>
+            <a:spLocks noGrp="1"/>
+          </p:cNvSpPr>
+          <p:nvPr>
+            <p:ph type="title"/>
+          </p:nvPr>
         </p:nvSpPr>
         <p:spPr>
           <a:xfrm>
-            <a:off x="6053328" y="1554480"/>
-            <a:ext cx="27432" cy="4572000"/>
+            <a:off x="457200" y="640080"/>
+            <a:ext cx="3291840" cy="4572000"/>
           </a:xfrm>
-          <a:prstGeom prst="rect">
-            <a:avLst/>
-          </a:prstGeom>
-          <a:solidFill>
-            <a:srgbClr val="9A4A6A"/>
-          </a:solidFill>
-          <a:ln>
-            <a:noFill/>
-          </a:ln>
-          <a:effectLst/>
         </p:spPr>
-        <p:style>
-          <a:lnRef idx="1">
-            <a:schemeClr val="accent1"/>
-          </a:lnRef>
-          <a:fillRef idx="3">
-            <a:schemeClr val="accent1"/>
-          </a:fillRef>
-          <a:effectRef idx="2">
-            <a:schemeClr val="accent1"/>
-          </a:effectRef>
-          <a:fontRef idx="minor">
-            <a:schemeClr val="lt1"/>
-          </a:fontRef>
-        </p:style>
-        <p:txBody>
-          <a:bodyPr rtlCol="0" anchor="ctr"/>
-          <a:lstStyle/>
-          <a:p>
-            <a:pPr algn="ctr"/>
-          </a:p>
-        </p:txBody>
-      </p:sp>
-    </p:spTree>
-  </p:cSld>
-  <p:clrMapOvr>
-    <a:masterClrMapping/>
-  </p:clrMapOvr>
-</p:sld>
-</file>
-
-<file path=ppt/slides/slide4.xml><?xml version="1.0" encoding="utf-8"?>
-<p:sld xmlns:a="http://schemas.openxmlformats.org/drawingml/2006/main" xmlns:p="http://schemas.openxmlformats.org/presentationml/2006/main" xmlns:r="http://schemas.openxmlformats.org/officeDocument/2006/relationships">
-  <p:cSld>
-    <p:spTree>
-      <p:nvGrpSpPr>
-        <p:cNvPr id="1" name=""/>
-        <p:cNvGrpSpPr/>
-        <p:nvPr/>
-      </p:nvGrpSpPr>
-      <p:grpSpPr/>
-      <p:sp>
-        <p:nvSpPr>
-          <p:cNvPr id="2" name="Title 1"/>
-          <p:cNvSpPr>
-            <a:spLocks noGrp="1"/>
-          </p:cNvSpPr>
-          <p:nvPr>
-            <p:ph type="title"/>
+        <p:txBody>
+          <a:bodyPr wrap="square" anchor="t"/>
+          <a:lstStyle/>
+          <a:p>
+            <a:pPr algn="l"/>
+            <a:r>
+              <a:rPr b="1" sz="2200">
+                <a:solidFill>
+                  <a:srgbClr val="FFFFFF"/>
+                </a:solidFill>
+                <a:latin typeface="Corbel"/>
+              </a:rPr>
+              <a:t>Demonstration highlights</a:t>
+            </a:r>
+          </a:p>
+        </p:txBody>
+      </p:sp>
+      <p:sp>
+        <p:nvSpPr>
+          <p:cNvPr id="3" name="Content Placeholder 2"/>
+          <p:cNvSpPr>
+            <a:spLocks noGrp="1"/>
+          </p:cNvSpPr>
+          <p:nvPr>
+            <p:ph idx="1"/>
           </p:nvPr>
         </p:nvSpPr>
         <p:spPr>
           <a:xfrm>
-            <a:off x="640080" y="384048"/>
-            <a:ext cx="10972800" cy="868680"/>
-          </a:xfrm>
-        </p:spPr>
-        <p:txBody>
-          <a:bodyPr wrap="square" anchor="t"/>
-          <a:lstStyle/>
-          <a:p>
-            <a:pPr algn="l"/>
-            <a:r>
-              <a:rPr b="1" sz="2700">
-                <a:solidFill>
-                  <a:srgbClr val="9A4A6A"/>
-                </a:solidFill>
-                <a:latin typeface="Corbel"/>
-              </a:rPr>
-              <a:t>Demonstration highlights</a:t>
-            </a:r>
-          </a:p>
-        </p:txBody>
-      </p:sp>
-      <p:sp>
-        <p:nvSpPr>
-          <p:cNvPr id="3" name="Content Placeholder 2"/>
-          <p:cNvSpPr>
-            <a:spLocks noGrp="1"/>
-          </p:cNvSpPr>
-          <p:nvPr>
-            <p:ph idx="1"/>
-          </p:nvPr>
-        </p:nvSpPr>
-        <p:spPr>
-          <a:xfrm>
-            <a:off x="658368" y="1481328"/>
-            <a:ext cx="5760720" cy="4754880"/>
+            <a:off x="4526280" y="685800"/>
+            <a:ext cx="3977639" cy="5394960"/>
           </a:xfrm>
         </p:spPr>
         <p:txBody>
@@ -4055,7 +4035,7 @@
                 <a:solidFill>
                   <a:srgbClr val="232A26"/>
                 </a:solidFill>
-                <a:latin typeface="Calibri"/>
+                <a:latin typeface="Verdana"/>
               </a:rPr>
               <a:t>Live dashboard during a local end-to-end run.</a:t>
             </a:r>
@@ -4071,7 +4051,7 @@
                 <a:solidFill>
                   <a:srgbClr val="232A26"/>
                 </a:solidFill>
-                <a:latin typeface="Calibri"/>
+                <a:latin typeface="Verdana"/>
               </a:rPr>
               <a:t>117 automated tests pass across the sensor, fog, ingest and dashboard modules.</a:t>
             </a:r>
@@ -4087,7 +4067,7 @@
                 <a:solidFill>
                   <a:srgbClr val="232A26"/>
                 </a:solidFill>
-                <a:latin typeface="Calibri"/>
+                <a:latin typeface="Verdana"/>
               </a:rPr>
               <a:t>2,000-message burst from 32 parallel senders absorbed; the queue keeps draining under load.</a:t>
             </a:r>
@@ -4103,7 +4083,7 @@
                 <a:solidFill>
                   <a:srgbClr val="232A26"/>
                 </a:solidFill>
-                <a:latin typeface="Calibri"/>
+                <a:latin typeface="Verdana"/>
               </a:rPr>
               <a:t>4 / 4 pipeline health checks green: gateway, queue, Lambda and end-to-end freshness.</a:t>
             </a:r>
@@ -4115,11 +4095,11 @@
               </a:spcAft>
             </a:pPr>
             <a:r>
-              <a:rPr sz="1500" b="1">
-                <a:solidFill>
-                  <a:srgbClr val="9A4A6A"/>
-                </a:solidFill>
-                <a:latin typeface="Calibri"/>
+              <a:rPr sz="1500" b="0">
+                <a:solidFill>
+                  <a:srgbClr val="232A26"/>
+                </a:solidFill>
+                <a:latin typeface="Verdana"/>
               </a:rPr>
               <a:t>Alert chips fire live when a rule trips.</a:t>
             </a:r>
@@ -4128,51 +4108,42 @@
       </p:sp>
       <p:sp>
         <p:nvSpPr>
-          <p:cNvPr id="4" name="Rectangle 3"/>
-          <p:cNvSpPr/>
+          <p:cNvPr id="5" name="TextBox 4"/>
+          <p:cNvSpPr txBox="1"/>
           <p:nvPr/>
         </p:nvSpPr>
         <p:spPr>
           <a:xfrm>
-            <a:off x="658368" y="1261872"/>
-            <a:ext cx="3108960" cy="36576"/>
+            <a:off x="502920" y="6126480"/>
+            <a:ext cx="1097280" cy="457200"/>
           </a:xfrm>
           <a:prstGeom prst="rect">
             <a:avLst/>
           </a:prstGeom>
-          <a:solidFill>
-            <a:srgbClr val="9A4A6A"/>
-          </a:solidFill>
-          <a:ln>
-            <a:noFill/>
-          </a:ln>
-          <a:effectLst/>
+          <a:noFill/>
         </p:spPr>
-        <p:style>
-          <a:lnRef idx="1">
-            <a:schemeClr val="accent1"/>
-          </a:lnRef>
-          <a:fillRef idx="3">
-            <a:schemeClr val="accent1"/>
-          </a:fillRef>
-          <a:effectRef idx="2">
-            <a:schemeClr val="accent1"/>
-          </a:effectRef>
-          <a:fontRef idx="minor">
-            <a:schemeClr val="lt1"/>
-          </a:fontRef>
-        </p:style>
-        <p:txBody>
-          <a:bodyPr rtlCol="0" anchor="ctr"/>
-          <a:lstStyle/>
-          <a:p>
-            <a:pPr algn="ctr"/>
+        <p:txBody>
+          <a:bodyPr wrap="square" anchor="t">
+            <a:spAutoFit/>
+          </a:bodyPr>
+          <a:lstStyle/>
+          <a:p>
+            <a:pPr algn="l"/>
+            <a:r>
+              <a:rPr sz="1400" b="1" i="0">
+                <a:solidFill>
+                  <a:srgbClr val="FFFFFF"/>
+                </a:solidFill>
+                <a:latin typeface="Corbel"/>
+              </a:rPr>
+              <a:t>03</a:t>
+            </a:r>
           </a:p>
         </p:txBody>
       </p:sp>
       <p:pic>
         <p:nvPicPr>
-          <p:cNvPr id="5" name="Picture 4" descr="dashboard-desktop.png"/>
+          <p:cNvPr id="6" name="Picture 5" descr="dashboard-desktop.png"/>
           <p:cNvPicPr>
             <a:picLocks noChangeAspect="1"/>
           </p:cNvPicPr>
@@ -4186,8 +4157,8 @@
         </p:blipFill>
         <p:spPr>
           <a:xfrm>
-            <a:off x="6629400" y="1707642"/>
-            <a:ext cx="5120640" cy="4192524"/>
+            <a:off x="8686800" y="1992106"/>
+            <a:ext cx="3063239" cy="2508027"/>
           </a:xfrm>
           <a:prstGeom prst="rect">
             <a:avLst/>
@@ -4214,259 +4185,20 @@
       <p:grpSpPr/>
       <p:sp>
         <p:nvSpPr>
-          <p:cNvPr id="2" name="Title 1"/>
-          <p:cNvSpPr>
-            <a:spLocks noGrp="1"/>
-          </p:cNvSpPr>
-          <p:nvPr>
-            <p:ph type="title"/>
-          </p:nvPr>
+          <p:cNvPr id="4" name="Rectangle 3"/>
+          <p:cNvSpPr/>
+          <p:nvPr/>
         </p:nvSpPr>
         <p:spPr>
           <a:xfrm>
-            <a:off x="640080" y="384048"/>
-            <a:ext cx="10972800" cy="868680"/>
-          </a:xfrm>
-        </p:spPr>
-        <p:txBody>
-          <a:bodyPr wrap="square" anchor="t"/>
-          <a:lstStyle/>
-          <a:p>
-            <a:pPr algn="l"/>
-            <a:r>
-              <a:rPr b="1" sz="2400">
-                <a:solidFill>
-                  <a:srgbClr val="9A4A6A"/>
-                </a:solidFill>
-                <a:latin typeface="Corbel"/>
-              </a:rPr>
-              <a:t>Hardest part: did that message really send?</a:t>
-            </a:r>
-          </a:p>
-        </p:txBody>
-      </p:sp>
-      <p:sp>
-        <p:nvSpPr>
-          <p:cNvPr id="3" name="Content Placeholder 2"/>
-          <p:cNvSpPr>
-            <a:spLocks noGrp="1"/>
-          </p:cNvSpPr>
-          <p:nvPr>
-            <p:ph idx="1" sz="half"/>
-          </p:nvPr>
-        </p:nvSpPr>
-        <p:spPr>
-          <a:xfrm>
-            <a:off x="658368" y="1481328"/>
-            <a:ext cx="4892040" cy="4846320"/>
-          </a:xfrm>
-        </p:spPr>
-        <p:txBody>
-          <a:bodyPr wrap="square">
-            <a:normAutofit/>
-          </a:bodyPr>
-          <a:lstStyle/>
-          <a:p>
-            <a:pPr>
-              <a:spcAft>
-                <a:spcPts val="800"/>
-              </a:spcAft>
-            </a:pPr>
-            <a:r>
-              <a:rPr sz="1500" b="0">
-                <a:solidFill>
-                  <a:srgbClr val="232A26"/>
-                </a:solidFill>
-                <a:latin typeface="Calibri"/>
-              </a:rPr>
-              <a:t>The problem: every window's aggregate is written into a Node stream that sends to Amazon SQS. The stream happily accepts the write; it never says whether that message actually reached the queue.</a:t>
-            </a:r>
-          </a:p>
-          <a:p>
-            <a:pPr>
-              <a:spcAft>
-                <a:spcPts val="800"/>
-              </a:spcAft>
-            </a:pPr>
-            <a:r>
-              <a:rPr sz="1500" b="0">
-                <a:solidFill>
-                  <a:srgbClr val="232A26"/>
-                </a:solidFill>
-                <a:latin typeface="Calibri"/>
-              </a:rPr>
-              <a:t>Why it was hard: streams report on the pipe, not the message, so there is no built-in "chunk N was delivered" signal. A stream error also tears the whole pipeline down, so one failed send could break every window after it.</a:t>
-            </a:r>
-          </a:p>
-          <a:p>
-            <a:pPr>
-              <a:spcAft>
-                <a:spcPts val="800"/>
-              </a:spcAft>
-            </a:pPr>
-            <a:r>
-              <a:rPr sz="1500" b="0">
-                <a:solidFill>
-                  <a:srgbClr val="232A26"/>
-                </a:solidFill>
-                <a:latin typeface="Calibri"/>
-              </a:rPr>
-              <a:t>The fix: tag each message with a sequence number before it enters the stream and hold a pending promise per tag. The queue sink settles exactly one promise per outcome, so a failure rejects only that caller and the stream keeps flowing.</a:t>
-            </a:r>
-          </a:p>
-          <a:p>
-            <a:pPr>
-              <a:spcAft>
-                <a:spcPts val="800"/>
-              </a:spcAft>
-            </a:pPr>
-            <a:r>
-              <a:rPr sz="1500" b="1">
-                <a:solidFill>
-                  <a:srgbClr val="9A4A6A"/>
-                </a:solidFill>
-                <a:latin typeface="Calibri"/>
-              </a:rPr>
-              <a:t>The tagged flow:</a:t>
-            </a:r>
-          </a:p>
-          <a:p>
-            <a:pPr lvl="1">
-              <a:spcAft>
-                <a:spcPts val="800"/>
-              </a:spcAft>
-            </a:pPr>
-            <a:r>
-              <a:rPr sz="1300" b="0">
-                <a:solidFill>
-                  <a:srgbClr val="232A26"/>
-                </a:solidFill>
-                <a:latin typeface="Calibri"/>
-              </a:rPr>
-              <a:t>Window aggregate, tagged ticket #42</a:t>
-            </a:r>
-          </a:p>
-          <a:p>
-            <a:pPr lvl="1">
-              <a:spcAft>
-                <a:spcPts val="800"/>
-              </a:spcAft>
-            </a:pPr>
-            <a:r>
-              <a:rPr sz="1300" b="0">
-                <a:solidFill>
-                  <a:srgbClr val="232A26"/>
-                </a:solidFill>
-                <a:latin typeface="Calibri"/>
-              </a:rPr>
-              <a:t>Stream pipeline: pass-through, queue sink</a:t>
-            </a:r>
-          </a:p>
-          <a:p>
-            <a:pPr lvl="1">
-              <a:spcAft>
-                <a:spcPts val="800"/>
-              </a:spcAft>
-            </a:pPr>
-            <a:r>
-              <a:rPr sz="1300" b="0">
-                <a:solidFill>
-                  <a:srgbClr val="232A26"/>
-                </a:solidFill>
-                <a:latin typeface="Calibri"/>
-              </a:rPr>
-              <a:t>Amazon SQS: fleet aggregates</a:t>
-            </a:r>
-          </a:p>
-          <a:p>
-            <a:pPr lvl="1">
-              <a:spcAft>
-                <a:spcPts val="800"/>
-              </a:spcAft>
-            </a:pPr>
-            <a:r>
-              <a:rPr sz="1300" b="0">
-                <a:solidFill>
-                  <a:srgbClr val="232A26"/>
-                </a:solidFill>
-                <a:latin typeface="Calibri"/>
-              </a:rPr>
-              <a:t>Ticket #42 delivered, resolved alone</a:t>
-            </a:r>
-          </a:p>
-          <a:p>
-            <a:pPr lvl="1">
-              <a:spcAft>
-                <a:spcPts val="800"/>
-              </a:spcAft>
-            </a:pPr>
-            <a:r>
-              <a:rPr sz="1300" b="0">
-                <a:solidFill>
-                  <a:srgbClr val="232A26"/>
-                </a:solidFill>
-                <a:latin typeface="Calibri"/>
-              </a:rPr>
-              <a:t>Ticket #43 failed, only #43 rejected</a:t>
-            </a:r>
-          </a:p>
-        </p:txBody>
-      </p:sp>
-      <p:sp>
-        <p:nvSpPr>
-          <p:cNvPr id="4" name="Content Placeholder 3"/>
-          <p:cNvSpPr>
-            <a:spLocks noGrp="1"/>
-          </p:cNvSpPr>
-          <p:nvPr>
-            <p:ph idx="2" sz="half"/>
-          </p:nvPr>
-        </p:nvSpPr>
-        <p:spPr>
-          <a:xfrm>
-            <a:off x="6382512" y="1481328"/>
-            <a:ext cx="4892040" cy="4846320"/>
-          </a:xfrm>
-        </p:spPr>
-        <p:txBody>
-          <a:bodyPr wrap="square">
-            <a:normAutofit/>
-          </a:bodyPr>
-          <a:lstStyle/>
-          <a:p>
-            <a:pPr>
-              <a:spcAft>
-                <a:spcPts val="800"/>
-              </a:spcAft>
-            </a:pPr>
-            <a:r>
-              <a:rPr sz="1500" b="1">
-                <a:solidFill>
-                  <a:srgbClr val="9A4A6A"/>
-                </a:solidFill>
-                <a:latin typeface="Calibri"/>
-              </a:rPr>
-              <a:t>Unit tests prove one bad send leaves every other window's publish untouched.</a:t>
-            </a:r>
-          </a:p>
-        </p:txBody>
-      </p:sp>
-      <p:sp>
-        <p:nvSpPr>
-          <p:cNvPr id="5" name="Rectangle 4"/>
-          <p:cNvSpPr/>
-          <p:nvPr/>
-        </p:nvSpPr>
-        <p:spPr>
-          <a:xfrm>
-            <a:off x="658368" y="1261872"/>
-            <a:ext cx="3108960" cy="36576"/>
+            <a:off x="0" y="0"/>
+            <a:ext cx="4114800" cy="6858000"/>
           </a:xfrm>
           <a:prstGeom prst="rect">
             <a:avLst/>
           </a:prstGeom>
           <a:solidFill>
-            <a:srgbClr val="9A4A6A"/>
+            <a:srgbClr val="5A5F7A"/>
           </a:solidFill>
           <a:ln>
             <a:noFill/>
@@ -4497,20 +4229,289 @@
       </p:sp>
       <p:sp>
         <p:nvSpPr>
-          <p:cNvPr id="6" name="Rectangle 5"/>
+          <p:cNvPr id="2" name="Title 1"/>
+          <p:cNvSpPr>
+            <a:spLocks noGrp="1"/>
+          </p:cNvSpPr>
+          <p:nvPr>
+            <p:ph type="title"/>
+          </p:nvPr>
+        </p:nvSpPr>
+        <p:spPr>
+          <a:xfrm>
+            <a:off x="457200" y="640080"/>
+            <a:ext cx="3291840" cy="4572000"/>
+          </a:xfrm>
+        </p:spPr>
+        <p:txBody>
+          <a:bodyPr wrap="square" anchor="t"/>
+          <a:lstStyle/>
+          <a:p>
+            <a:pPr algn="l"/>
+            <a:r>
+              <a:rPr b="1" sz="1800">
+                <a:solidFill>
+                  <a:srgbClr val="FFFFFF"/>
+                </a:solidFill>
+                <a:latin typeface="Corbel"/>
+              </a:rPr>
+              <a:t>Hardest part: did that message really send?</a:t>
+            </a:r>
+          </a:p>
+        </p:txBody>
+      </p:sp>
+      <p:sp>
+        <p:nvSpPr>
+          <p:cNvPr id="3" name="Content Placeholder 2"/>
+          <p:cNvSpPr>
+            <a:spLocks noGrp="1"/>
+          </p:cNvSpPr>
+          <p:nvPr>
+            <p:ph idx="1"/>
+          </p:nvPr>
+        </p:nvSpPr>
+        <p:spPr>
+          <a:xfrm>
+            <a:off x="4572000" y="640080"/>
+            <a:ext cx="6492240" cy="5577840"/>
+          </a:xfrm>
+        </p:spPr>
+        <p:txBody>
+          <a:bodyPr wrap="square">
+            <a:normAutofit/>
+          </a:bodyPr>
+          <a:lstStyle/>
+          <a:p>
+            <a:pPr>
+              <a:spcAft>
+                <a:spcPts val="600"/>
+              </a:spcAft>
+            </a:pPr>
+            <a:r>
+              <a:rPr sz="1500" b="0">
+                <a:solidFill>
+                  <a:srgbClr val="232A26"/>
+                </a:solidFill>
+                <a:latin typeface="Verdana"/>
+              </a:rPr>
+              <a:t>The problem: every window's aggregate is written into a Node stream that sends to Amazon SQS. The stream happily accepts the write; it never says whether that message actually reached the queue.</a:t>
+            </a:r>
+          </a:p>
+          <a:p>
+            <a:pPr>
+              <a:spcAft>
+                <a:spcPts val="600"/>
+              </a:spcAft>
+            </a:pPr>
+            <a:r>
+              <a:rPr sz="1500" b="0">
+                <a:solidFill>
+                  <a:srgbClr val="232A26"/>
+                </a:solidFill>
+                <a:latin typeface="Verdana"/>
+              </a:rPr>
+              <a:t>Why it was hard: streams report on the pipe, not the message, so there is no built-in "chunk N was delivered" signal. A stream error also tears the whole pipeline down, so one failed send could break every window after it.</a:t>
+            </a:r>
+          </a:p>
+          <a:p>
+            <a:pPr>
+              <a:spcAft>
+                <a:spcPts val="600"/>
+              </a:spcAft>
+            </a:pPr>
+            <a:r>
+              <a:rPr sz="1500" b="0">
+                <a:solidFill>
+                  <a:srgbClr val="232A26"/>
+                </a:solidFill>
+                <a:latin typeface="Verdana"/>
+              </a:rPr>
+              <a:t>The fix: tag each message with a sequence number before it enters the stream and hold a pending promise per tag. The queue sink settles exactly one promise per outcome, so a failure rejects only that caller and the stream keeps flowing.</a:t>
+            </a:r>
+          </a:p>
+          <a:p>
+            <a:pPr>
+              <a:spcAft>
+                <a:spcPts val="600"/>
+              </a:spcAft>
+            </a:pPr>
+            <a:r>
+              <a:rPr sz="1500" b="0">
+                <a:solidFill>
+                  <a:srgbClr val="232A26"/>
+                </a:solidFill>
+                <a:latin typeface="Verdana"/>
+              </a:rPr>
+              <a:t>The tagged flow:</a:t>
+            </a:r>
+          </a:p>
+          <a:p>
+            <a:pPr lvl="1">
+              <a:spcAft>
+                <a:spcPts val="600"/>
+              </a:spcAft>
+            </a:pPr>
+            <a:r>
+              <a:rPr sz="1300" b="0">
+                <a:solidFill>
+                  <a:srgbClr val="232A26"/>
+                </a:solidFill>
+                <a:latin typeface="Verdana"/>
+              </a:rPr>
+              <a:t>Window aggregate, tagged ticket #42</a:t>
+            </a:r>
+          </a:p>
+          <a:p>
+            <a:pPr lvl="1">
+              <a:spcAft>
+                <a:spcPts val="600"/>
+              </a:spcAft>
+            </a:pPr>
+            <a:r>
+              <a:rPr sz="1300" b="0">
+                <a:solidFill>
+                  <a:srgbClr val="232A26"/>
+                </a:solidFill>
+                <a:latin typeface="Verdana"/>
+              </a:rPr>
+              <a:t>Stream pipeline: pass-through, queue sink</a:t>
+            </a:r>
+          </a:p>
+          <a:p>
+            <a:pPr lvl="1">
+              <a:spcAft>
+                <a:spcPts val="600"/>
+              </a:spcAft>
+            </a:pPr>
+            <a:r>
+              <a:rPr sz="1300" b="0">
+                <a:solidFill>
+                  <a:srgbClr val="232A26"/>
+                </a:solidFill>
+                <a:latin typeface="Verdana"/>
+              </a:rPr>
+              <a:t>Amazon SQS: fleet aggregates</a:t>
+            </a:r>
+          </a:p>
+          <a:p>
+            <a:pPr lvl="1">
+              <a:spcAft>
+                <a:spcPts val="600"/>
+              </a:spcAft>
+            </a:pPr>
+            <a:r>
+              <a:rPr sz="1300" b="0">
+                <a:solidFill>
+                  <a:srgbClr val="232A26"/>
+                </a:solidFill>
+                <a:latin typeface="Verdana"/>
+              </a:rPr>
+              <a:t>Ticket #42 delivered, resolved alone</a:t>
+            </a:r>
+          </a:p>
+          <a:p>
+            <a:pPr lvl="1">
+              <a:spcAft>
+                <a:spcPts val="600"/>
+              </a:spcAft>
+            </a:pPr>
+            <a:r>
+              <a:rPr sz="1300" b="0">
+                <a:solidFill>
+                  <a:srgbClr val="232A26"/>
+                </a:solidFill>
+                <a:latin typeface="Verdana"/>
+              </a:rPr>
+              <a:t>Ticket #43 failed, only #43 rejected</a:t>
+            </a:r>
+          </a:p>
+          <a:p>
+            <a:pPr>
+              <a:spcAft>
+                <a:spcPts val="600"/>
+              </a:spcAft>
+            </a:pPr>
+            <a:r>
+              <a:rPr sz="1500" b="0">
+                <a:solidFill>
+                  <a:srgbClr val="232A26"/>
+                </a:solidFill>
+                <a:latin typeface="Verdana"/>
+              </a:rPr>
+              <a:t>Unit tests prove one bad send leaves every other window's publish untouched.</a:t>
+            </a:r>
+          </a:p>
+        </p:txBody>
+      </p:sp>
+      <p:sp>
+        <p:nvSpPr>
+          <p:cNvPr id="5" name="TextBox 4"/>
+          <p:cNvSpPr txBox="1"/>
+          <p:nvPr/>
+        </p:nvSpPr>
+        <p:spPr>
+          <a:xfrm>
+            <a:off x="502920" y="6126480"/>
+            <a:ext cx="1097280" cy="457200"/>
+          </a:xfrm>
+          <a:prstGeom prst="rect">
+            <a:avLst/>
+          </a:prstGeom>
+          <a:noFill/>
+        </p:spPr>
+        <p:txBody>
+          <a:bodyPr wrap="square" anchor="t">
+            <a:spAutoFit/>
+          </a:bodyPr>
+          <a:lstStyle/>
+          <a:p>
+            <a:pPr algn="l"/>
+            <a:r>
+              <a:rPr sz="1400" b="1" i="0">
+                <a:solidFill>
+                  <a:srgbClr val="FFFFFF"/>
+                </a:solidFill>
+                <a:latin typeface="Corbel"/>
+              </a:rPr>
+              <a:t>04</a:t>
+            </a:r>
+          </a:p>
+        </p:txBody>
+      </p:sp>
+    </p:spTree>
+  </p:cSld>
+  <p:clrMapOvr>
+    <a:masterClrMapping/>
+  </p:clrMapOvr>
+</p:sld>
+</file>
+
+<file path=ppt/slides/slide6.xml><?xml version="1.0" encoding="utf-8"?>
+<p:sld xmlns:a="http://schemas.openxmlformats.org/drawingml/2006/main" xmlns:p="http://schemas.openxmlformats.org/presentationml/2006/main" xmlns:r="http://schemas.openxmlformats.org/officeDocument/2006/relationships">
+  <p:cSld>
+    <p:spTree>
+      <p:nvGrpSpPr>
+        <p:cNvPr id="1" name=""/>
+        <p:cNvGrpSpPr/>
+        <p:nvPr/>
+      </p:nvGrpSpPr>
+      <p:grpSpPr/>
+      <p:sp>
+        <p:nvSpPr>
+          <p:cNvPr id="4" name="Rectangle 3"/>
           <p:cNvSpPr/>
           <p:nvPr/>
         </p:nvSpPr>
         <p:spPr>
           <a:xfrm>
-            <a:off x="6053328" y="1554480"/>
-            <a:ext cx="27432" cy="4572000"/>
+            <a:off x="0" y="0"/>
+            <a:ext cx="4114800" cy="6858000"/>
           </a:xfrm>
           <a:prstGeom prst="rect">
             <a:avLst/>
           </a:prstGeom>
           <a:solidFill>
-            <a:srgbClr val="9A4A6A"/>
+            <a:srgbClr val="5A5F7A"/>
           </a:solidFill>
           <a:ln>
             <a:noFill/>
@@ -4539,24 +4540,6 @@
           </a:p>
         </p:txBody>
       </p:sp>
-    </p:spTree>
-  </p:cSld>
-  <p:clrMapOvr>
-    <a:masterClrMapping/>
-  </p:clrMapOvr>
-</p:sld>
-</file>
-
-<file path=ppt/slides/slide6.xml><?xml version="1.0" encoding="utf-8"?>
-<p:sld xmlns:a="http://schemas.openxmlformats.org/drawingml/2006/main" xmlns:p="http://schemas.openxmlformats.org/presentationml/2006/main" xmlns:r="http://schemas.openxmlformats.org/officeDocument/2006/relationships">
-  <p:cSld>
-    <p:spTree>
-      <p:nvGrpSpPr>
-        <p:cNvPr id="1" name=""/>
-        <p:cNvGrpSpPr/>
-        <p:nvPr/>
-      </p:nvGrpSpPr>
-      <p:grpSpPr/>
       <p:sp>
         <p:nvSpPr>
           <p:cNvPr id="2" name="Title 1"/>
@@ -4569,8 +4552,8 @@
         </p:nvSpPr>
         <p:spPr>
           <a:xfrm>
-            <a:off x="640080" y="384048"/>
-            <a:ext cx="10972800" cy="868680"/>
+            <a:off x="457200" y="640080"/>
+            <a:ext cx="3291840" cy="4572000"/>
           </a:xfrm>
         </p:spPr>
         <p:txBody>
@@ -4579,9 +4562,9 @@
           <a:p>
             <a:pPr algn="l"/>
             <a:r>
-              <a:rPr b="1" sz="2700">
-                <a:solidFill>
-                  <a:srgbClr val="9A4A6A"/>
+              <a:rPr b="1" sz="2200">
+                <a:solidFill>
+                  <a:srgbClr val="FFFFFF"/>
                 </a:solidFill>
                 <a:latin typeface="Corbel"/>
               </a:rPr>
@@ -4597,13 +4580,13 @@
             <a:spLocks noGrp="1"/>
           </p:cNvSpPr>
           <p:nvPr>
-            <p:ph idx="1" sz="half"/>
+            <p:ph idx="1"/>
           </p:nvPr>
         </p:nvSpPr>
         <p:spPr>
           <a:xfrm>
-            <a:off x="658368" y="1481328"/>
-            <a:ext cx="4892040" cy="4846320"/>
+            <a:off x="4572000" y="640080"/>
+            <a:ext cx="6492240" cy="5577840"/>
           </a:xfrm>
         </p:spPr>
         <p:txBody>
@@ -4614,15 +4597,15 @@
           <a:p>
             <a:pPr>
               <a:spcAft>
-                <a:spcPts val="800"/>
+                <a:spcPts val="900"/>
               </a:spcAft>
             </a:pPr>
             <a:r>
-              <a:rPr sz="1500" b="1">
-                <a:solidFill>
-                  <a:srgbClr val="9A4A6A"/>
-                </a:solidFill>
-                <a:latin typeface="Calibri"/>
+              <a:rPr sz="1700" b="0">
+                <a:solidFill>
+                  <a:srgbClr val="232A26"/>
+                </a:solidFill>
+                <a:latin typeface="Verdana"/>
               </a:rPr>
               <a:t>Decide at the edge</a:t>
             </a:r>
@@ -4630,15 +4613,15 @@
           <a:p>
             <a:pPr lvl="1">
               <a:spcAft>
-                <a:spcPts val="800"/>
+                <a:spcPts val="900"/>
               </a:spcAft>
             </a:pPr>
             <a:r>
-              <a:rPr sz="1300" b="0">
+              <a:rPr sz="1500" b="0">
                 <a:solidFill>
                   <a:srgbClr val="232A26"/>
                 </a:solidFill>
-                <a:latin typeface="Calibri"/>
+                <a:latin typeface="Verdana"/>
               </a:rPr>
               <a:t>Raw readings never leave the building. The fog node aggregates ten streams and applies four safety rules right next to the machines.</a:t>
             </a:r>
@@ -4646,15 +4629,15 @@
           <a:p>
             <a:pPr>
               <a:spcAft>
-                <a:spcPts val="800"/>
+                <a:spcPts val="900"/>
               </a:spcAft>
             </a:pPr>
             <a:r>
-              <a:rPr sz="1500" b="1">
-                <a:solidFill>
-                  <a:srgbClr val="9A4A6A"/>
-                </a:solidFill>
-                <a:latin typeface="Calibri"/>
+              <a:rPr sz="1700" b="0">
+                <a:solidFill>
+                  <a:srgbClr val="232A26"/>
+                </a:solidFill>
+                <a:latin typeface="Verdana"/>
               </a:rPr>
               <a:t>Trust through testing</a:t>
             </a:r>
@@ -4662,177 +4645,101 @@
           <a:p>
             <a:pPr lvl="1">
               <a:spcAft>
-                <a:spcPts val="800"/>
+                <a:spcPts val="900"/>
               </a:spcAft>
             </a:pPr>
             <a:r>
-              <a:rPr sz="1300" b="0">
+              <a:rPr sz="1500" b="0">
                 <a:solidFill>
                   <a:srgbClr val="232A26"/>
                 </a:solidFill>
-                <a:latin typeface="Calibri"/>
+                <a:latin typeface="Verdana"/>
               </a:rPr>
               <a:t>117 automated tests, a scripted end-to-end pipeline check, and a 2,000-message burst test back every claim on these slides.</a:t>
             </a:r>
           </a:p>
-        </p:txBody>
-      </p:sp>
-      <p:sp>
-        <p:nvSpPr>
-          <p:cNvPr id="4" name="Content Placeholder 3"/>
-          <p:cNvSpPr>
-            <a:spLocks noGrp="1"/>
-          </p:cNvSpPr>
-          <p:nvPr>
-            <p:ph idx="2" sz="half"/>
-          </p:nvPr>
+          <a:p>
+            <a:pPr>
+              <a:spcAft>
+                <a:spcPts val="900"/>
+              </a:spcAft>
+            </a:pPr>
+            <a:r>
+              <a:rPr sz="1700" b="0">
+                <a:solidFill>
+                  <a:srgbClr val="232A26"/>
+                </a:solidFill>
+                <a:latin typeface="Verdana"/>
+              </a:rPr>
+              <a:t>Cloud-ready by design</a:t>
+            </a:r>
+          </a:p>
+          <a:p>
+            <a:pPr lvl="1">
+              <a:spcAft>
+                <a:spcPts val="900"/>
+              </a:spcAft>
+            </a:pPr>
+            <a:r>
+              <a:rPr sz="1500" b="0">
+                <a:solidFill>
+                  <a:srgbClr val="232A26"/>
+                </a:solidFill>
+                <a:latin typeface="Verdana"/>
+              </a:rPr>
+              <a:t>The same AWS SDK code runs on the local emulator and on real AWS. Deployment is one scripted step, not a rewrite.</a:t>
+            </a:r>
+          </a:p>
+          <a:p>
+            <a:pPr>
+              <a:spcAft>
+                <a:spcPts val="900"/>
+              </a:spcAft>
+            </a:pPr>
+            <a:r>
+              <a:rPr sz="1700" b="0">
+                <a:solidFill>
+                  <a:srgbClr val="232A26"/>
+                </a:solidFill>
+                <a:latin typeface="Verdana"/>
+              </a:rPr>
+              <a:t>Thank you. Questions?</a:t>
+            </a:r>
+          </a:p>
+        </p:txBody>
+      </p:sp>
+      <p:sp>
+        <p:nvSpPr>
+          <p:cNvPr id="5" name="TextBox 4"/>
+          <p:cNvSpPr txBox="1"/>
+          <p:nvPr/>
         </p:nvSpPr>
         <p:spPr>
           <a:xfrm>
-            <a:off x="6382512" y="1481328"/>
-            <a:ext cx="4892040" cy="4846320"/>
-          </a:xfrm>
-        </p:spPr>
-        <p:txBody>
-          <a:bodyPr wrap="square">
-            <a:normAutofit/>
-          </a:bodyPr>
-          <a:lstStyle/>
-          <a:p>
-            <a:pPr>
-              <a:spcAft>
-                <a:spcPts val="800"/>
-              </a:spcAft>
-            </a:pPr>
-            <a:r>
-              <a:rPr sz="1500" b="1">
-                <a:solidFill>
-                  <a:srgbClr val="9A4A6A"/>
-                </a:solidFill>
-                <a:latin typeface="Calibri"/>
-              </a:rPr>
-              <a:t>Cloud-ready by design</a:t>
-            </a:r>
-          </a:p>
-          <a:p>
-            <a:pPr lvl="1">
-              <a:spcAft>
-                <a:spcPts val="800"/>
-              </a:spcAft>
-            </a:pPr>
-            <a:r>
-              <a:rPr sz="1300" b="0">
-                <a:solidFill>
-                  <a:srgbClr val="232A26"/>
-                </a:solidFill>
-                <a:latin typeface="Calibri"/>
-              </a:rPr>
-              <a:t>The same AWS SDK code runs on the local emulator and on real AWS. Deployment is one scripted step, not a rewrite.</a:t>
-            </a:r>
-          </a:p>
-          <a:p>
-            <a:pPr>
-              <a:spcAft>
-                <a:spcPts val="800"/>
-              </a:spcAft>
-            </a:pPr>
-            <a:r>
-              <a:rPr sz="1500" b="0">
-                <a:solidFill>
-                  <a:srgbClr val="232A26"/>
-                </a:solidFill>
-                <a:latin typeface="Calibri"/>
-              </a:rPr>
-              <a:t>Thank you. Questions?</a:t>
-            </a:r>
-          </a:p>
-        </p:txBody>
-      </p:sp>
-      <p:sp>
-        <p:nvSpPr>
-          <p:cNvPr id="5" name="Rectangle 4"/>
-          <p:cNvSpPr/>
-          <p:nvPr/>
-        </p:nvSpPr>
-        <p:spPr>
-          <a:xfrm>
-            <a:off x="658368" y="1261872"/>
-            <a:ext cx="3108960" cy="36576"/>
+            <a:off x="502920" y="6126480"/>
+            <a:ext cx="1097280" cy="457200"/>
           </a:xfrm>
           <a:prstGeom prst="rect">
             <a:avLst/>
           </a:prstGeom>
-          <a:solidFill>
-            <a:srgbClr val="9A4A6A"/>
-          </a:solidFill>
-          <a:ln>
-            <a:noFill/>
-          </a:ln>
-          <a:effectLst/>
+          <a:noFill/>
         </p:spPr>
-        <p:style>
-          <a:lnRef idx="1">
-            <a:schemeClr val="accent1"/>
-          </a:lnRef>
-          <a:fillRef idx="3">
-            <a:schemeClr val="accent1"/>
-          </a:fillRef>
-          <a:effectRef idx="2">
-            <a:schemeClr val="accent1"/>
-          </a:effectRef>
-          <a:fontRef idx="minor">
-            <a:schemeClr val="lt1"/>
-          </a:fontRef>
-        </p:style>
-        <p:txBody>
-          <a:bodyPr rtlCol="0" anchor="ctr"/>
-          <a:lstStyle/>
-          <a:p>
-            <a:pPr algn="ctr"/>
-          </a:p>
-        </p:txBody>
-      </p:sp>
-      <p:sp>
-        <p:nvSpPr>
-          <p:cNvPr id="6" name="Rectangle 5"/>
-          <p:cNvSpPr/>
-          <p:nvPr/>
-        </p:nvSpPr>
-        <p:spPr>
-          <a:xfrm>
-            <a:off x="6053328" y="1554480"/>
-            <a:ext cx="27432" cy="4572000"/>
-          </a:xfrm>
-          <a:prstGeom prst="rect">
-            <a:avLst/>
-          </a:prstGeom>
-          <a:solidFill>
-            <a:srgbClr val="9A4A6A"/>
-          </a:solidFill>
-          <a:ln>
-            <a:noFill/>
-          </a:ln>
-          <a:effectLst/>
-        </p:spPr>
-        <p:style>
-          <a:lnRef idx="1">
-            <a:schemeClr val="accent1"/>
-          </a:lnRef>
-          <a:fillRef idx="3">
-            <a:schemeClr val="accent1"/>
-          </a:fillRef>
-          <a:effectRef idx="2">
-            <a:schemeClr val="accent1"/>
-          </a:effectRef>
-          <a:fontRef idx="minor">
-            <a:schemeClr val="lt1"/>
-          </a:fontRef>
-        </p:style>
-        <p:txBody>
-          <a:bodyPr rtlCol="0" anchor="ctr"/>
-          <a:lstStyle/>
-          <a:p>
-            <a:pPr algn="ctr"/>
+        <p:txBody>
+          <a:bodyPr wrap="square" anchor="t">
+            <a:spAutoFit/>
+          </a:bodyPr>
+          <a:lstStyle/>
+          <a:p>
+            <a:pPr algn="l"/>
+            <a:r>
+              <a:rPr sz="1400" b="1" i="0">
+                <a:solidFill>
+                  <a:srgbClr val="FFFFFF"/>
+                </a:solidFill>
+                <a:latin typeface="Corbel"/>
+              </a:rPr>
+              <a:t>05</a:t>
+            </a:r>
           </a:p>
         </p:txBody>
       </p:sp>
